--- a/ReactJS/Reactjs.pptx
+++ b/ReactJS/Reactjs.pptx
@@ -9,6 +9,8 @@
     <p:sldId id="257" r:id="rId3"/>
     <p:sldId id="258" r:id="rId4"/>
     <p:sldId id="259" r:id="rId5"/>
+    <p:sldId id="260" r:id="rId6"/>
+    <p:sldId id="261" r:id="rId7"/>
   </p:sldIdLst>
   <p:sldSz cx="12192000" cy="6858000"/>
   <p:notesSz cx="6858000" cy="9144000"/>
@@ -264,7 +266,7 @@
           <a:p>
             <a:fld id="{E604A9DE-5D16-5148-A31A-5AFF5E45A3E1}" type="datetimeFigureOut">
               <a:rPr lang="en-US" smtClean="0"/>
-              <a:t>3/27/26</a:t>
+              <a:t>4/3/26</a:t>
             </a:fld>
             <a:endParaRPr lang="en-US"/>
           </a:p>
@@ -464,7 +466,7 @@
           <a:p>
             <a:fld id="{E604A9DE-5D16-5148-A31A-5AFF5E45A3E1}" type="datetimeFigureOut">
               <a:rPr lang="en-US" smtClean="0"/>
-              <a:t>3/27/26</a:t>
+              <a:t>4/3/26</a:t>
             </a:fld>
             <a:endParaRPr lang="en-US"/>
           </a:p>
@@ -674,7 +676,7 @@
           <a:p>
             <a:fld id="{E604A9DE-5D16-5148-A31A-5AFF5E45A3E1}" type="datetimeFigureOut">
               <a:rPr lang="en-US" smtClean="0"/>
-              <a:t>3/27/26</a:t>
+              <a:t>4/3/26</a:t>
             </a:fld>
             <a:endParaRPr lang="en-US"/>
           </a:p>
@@ -874,7 +876,7 @@
           <a:p>
             <a:fld id="{E604A9DE-5D16-5148-A31A-5AFF5E45A3E1}" type="datetimeFigureOut">
               <a:rPr lang="en-US" smtClean="0"/>
-              <a:t>3/27/26</a:t>
+              <a:t>4/3/26</a:t>
             </a:fld>
             <a:endParaRPr lang="en-US"/>
           </a:p>
@@ -1150,7 +1152,7 @@
           <a:p>
             <a:fld id="{E604A9DE-5D16-5148-A31A-5AFF5E45A3E1}" type="datetimeFigureOut">
               <a:rPr lang="en-US" smtClean="0"/>
-              <a:t>3/27/26</a:t>
+              <a:t>4/3/26</a:t>
             </a:fld>
             <a:endParaRPr lang="en-US"/>
           </a:p>
@@ -1418,7 +1420,7 @@
           <a:p>
             <a:fld id="{E604A9DE-5D16-5148-A31A-5AFF5E45A3E1}" type="datetimeFigureOut">
               <a:rPr lang="en-US" smtClean="0"/>
-              <a:t>3/27/26</a:t>
+              <a:t>4/3/26</a:t>
             </a:fld>
             <a:endParaRPr lang="en-US"/>
           </a:p>
@@ -1833,7 +1835,7 @@
           <a:p>
             <a:fld id="{E604A9DE-5D16-5148-A31A-5AFF5E45A3E1}" type="datetimeFigureOut">
               <a:rPr lang="en-US" smtClean="0"/>
-              <a:t>3/27/26</a:t>
+              <a:t>4/3/26</a:t>
             </a:fld>
             <a:endParaRPr lang="en-US"/>
           </a:p>
@@ -1975,7 +1977,7 @@
           <a:p>
             <a:fld id="{E604A9DE-5D16-5148-A31A-5AFF5E45A3E1}" type="datetimeFigureOut">
               <a:rPr lang="en-US" smtClean="0"/>
-              <a:t>3/27/26</a:t>
+              <a:t>4/3/26</a:t>
             </a:fld>
             <a:endParaRPr lang="en-US"/>
           </a:p>
@@ -2088,7 +2090,7 @@
           <a:p>
             <a:fld id="{E604A9DE-5D16-5148-A31A-5AFF5E45A3E1}" type="datetimeFigureOut">
               <a:rPr lang="en-US" smtClean="0"/>
-              <a:t>3/27/26</a:t>
+              <a:t>4/3/26</a:t>
             </a:fld>
             <a:endParaRPr lang="en-US"/>
           </a:p>
@@ -2401,7 +2403,7 @@
           <a:p>
             <a:fld id="{E604A9DE-5D16-5148-A31A-5AFF5E45A3E1}" type="datetimeFigureOut">
               <a:rPr lang="en-US" smtClean="0"/>
-              <a:t>3/27/26</a:t>
+              <a:t>4/3/26</a:t>
             </a:fld>
             <a:endParaRPr lang="en-US"/>
           </a:p>
@@ -2690,7 +2692,7 @@
           <a:p>
             <a:fld id="{E604A9DE-5D16-5148-A31A-5AFF5E45A3E1}" type="datetimeFigureOut">
               <a:rPr lang="en-US" smtClean="0"/>
-              <a:t>3/27/26</a:t>
+              <a:t>4/3/26</a:t>
             </a:fld>
             <a:endParaRPr lang="en-US"/>
           </a:p>
@@ -2933,7 +2935,7 @@
           <a:p>
             <a:fld id="{E604A9DE-5D16-5148-A31A-5AFF5E45A3E1}" type="datetimeFigureOut">
               <a:rPr lang="en-US" smtClean="0"/>
-              <a:t>3/27/26</a:t>
+              <a:t>4/3/26</a:t>
             </a:fld>
             <a:endParaRPr lang="en-US"/>
           </a:p>
@@ -3721,13 +3723,88 @@
         </p:nvSpPr>
         <p:spPr/>
         <p:txBody>
-          <a:bodyPr/>
-          <a:lstStyle/>
-          <a:p>
-            <a:r>
-              <a:rPr lang="en-US"/>
+          <a:bodyPr>
+            <a:normAutofit lnSpcReduction="10000"/>
+          </a:bodyPr>
+          <a:lstStyle/>
+          <a:p>
+            <a:r>
+              <a:rPr lang="en-US" dirty="0"/>
               <a:t>Why we need States ?</a:t>
             </a:r>
+          </a:p>
+          <a:p>
+            <a:r>
+              <a:rPr lang="en-US" dirty="0"/>
+              <a:t>State Introduction </a:t>
+            </a:r>
+            <a:r>
+              <a:rPr lang="en-US" dirty="0" err="1"/>
+              <a:t>useState</a:t>
+            </a:r>
+            <a:endParaRPr lang="en-US" dirty="0"/>
+          </a:p>
+          <a:p>
+            <a:r>
+              <a:rPr lang="en-US" dirty="0" err="1"/>
+              <a:t>useState</a:t>
+            </a:r>
+            <a:r>
+              <a:rPr lang="en-US" dirty="0"/>
+              <a:t> Multiple Updates</a:t>
+            </a:r>
+          </a:p>
+          <a:p>
+            <a:r>
+              <a:rPr lang="en-US" dirty="0" err="1"/>
+              <a:t>useState</a:t>
+            </a:r>
+            <a:r>
+              <a:rPr lang="en-US" dirty="0"/>
+              <a:t> Array State Value</a:t>
+            </a:r>
+          </a:p>
+          <a:p>
+            <a:r>
+              <a:rPr lang="en-US" dirty="0" err="1"/>
+              <a:t>useState</a:t>
+            </a:r>
+            <a:r>
+              <a:rPr lang="en-US" dirty="0"/>
+              <a:t> Array </a:t>
+            </a:r>
+            <a:r>
+              <a:rPr lang="en-US" dirty="0" err="1"/>
+              <a:t>setState</a:t>
+            </a:r>
+            <a:r>
+              <a:rPr lang="en-US" dirty="0"/>
+              <a:t> Value</a:t>
+            </a:r>
+          </a:p>
+          <a:p>
+            <a:r>
+              <a:rPr lang="en-US" dirty="0"/>
+              <a:t>Conditional Templates</a:t>
+            </a:r>
+          </a:p>
+          <a:p>
+            <a:endParaRPr lang="en-US" dirty="0"/>
+          </a:p>
+          <a:p>
+            <a:r>
+              <a:rPr lang="en-US" dirty="0"/>
+              <a:t>Multiple Components &amp; Fragments</a:t>
+            </a:r>
+          </a:p>
+          <a:p>
+            <a:r>
+              <a:rPr lang="en-US" dirty="0"/>
+              <a:t>Props In-depth</a:t>
+            </a:r>
+          </a:p>
+          <a:p>
+            <a:endParaRPr lang="en-US" dirty="0"/>
           </a:p>
         </p:txBody>
       </p:sp>
@@ -3735,6 +3812,720 @@
     <p:extLst>
       <p:ext uri="{BB962C8B-B14F-4D97-AF65-F5344CB8AC3E}">
         <p14:creationId xmlns:p14="http://schemas.microsoft.com/office/powerpoint/2010/main" val="57581461"/>
+      </p:ext>
+    </p:extLst>
+  </p:cSld>
+  <p:clrMapOvr>
+    <a:masterClrMapping/>
+  </p:clrMapOvr>
+</p:sld>
+</file>
+
+<file path=ppt/slides/slide5.xml><?xml version="1.0" encoding="utf-8"?>
+<p:sld xmlns:a="http://schemas.openxmlformats.org/drawingml/2006/main" xmlns:r="http://schemas.openxmlformats.org/officeDocument/2006/relationships" xmlns:p="http://schemas.openxmlformats.org/presentationml/2006/main">
+  <p:cSld>
+    <p:spTree>
+      <p:nvGrpSpPr>
+        <p:cNvPr id="1" name=""/>
+        <p:cNvGrpSpPr/>
+        <p:nvPr/>
+      </p:nvGrpSpPr>
+      <p:grpSpPr>
+        <a:xfrm>
+          <a:off x="0" y="0"/>
+          <a:ext cx="0" cy="0"/>
+          <a:chOff x="0" y="0"/>
+          <a:chExt cx="0" cy="0"/>
+        </a:xfrm>
+      </p:grpSpPr>
+      <p:sp>
+        <p:nvSpPr>
+          <p:cNvPr id="4" name="Rounded Rectangle 3">
+            <a:extLst>
+              <a:ext uri="{FF2B5EF4-FFF2-40B4-BE49-F238E27FC236}">
+                <a16:creationId xmlns:a16="http://schemas.microsoft.com/office/drawing/2014/main" id="{6765F7B9-36D6-513C-6622-B92FAC96BC97}"/>
+              </a:ext>
+            </a:extLst>
+          </p:cNvPr>
+          <p:cNvSpPr/>
+          <p:nvPr/>
+        </p:nvSpPr>
+        <p:spPr>
+          <a:xfrm>
+            <a:off x="5127171" y="468085"/>
+            <a:ext cx="2177143" cy="674914"/>
+          </a:xfrm>
+          <a:prstGeom prst="roundRect">
+            <a:avLst/>
+          </a:prstGeom>
+        </p:spPr>
+        <p:style>
+          <a:lnRef idx="2">
+            <a:schemeClr val="accent1">
+              <a:shade val="15000"/>
+            </a:schemeClr>
+          </a:lnRef>
+          <a:fillRef idx="1">
+            <a:schemeClr val="accent1"/>
+          </a:fillRef>
+          <a:effectRef idx="0">
+            <a:schemeClr val="accent1"/>
+          </a:effectRef>
+          <a:fontRef idx="minor">
+            <a:schemeClr val="lt1"/>
+          </a:fontRef>
+        </p:style>
+        <p:txBody>
+          <a:bodyPr rtlCol="0" anchor="ctr"/>
+          <a:lstStyle/>
+          <a:p>
+            <a:pPr algn="ctr"/>
+            <a:r>
+              <a:rPr lang="en-US" dirty="0"/>
+              <a:t>root</a:t>
+            </a:r>
+          </a:p>
+        </p:txBody>
+      </p:sp>
+      <p:sp>
+        <p:nvSpPr>
+          <p:cNvPr id="5" name="Rounded Rectangle 4">
+            <a:extLst>
+              <a:ext uri="{FF2B5EF4-FFF2-40B4-BE49-F238E27FC236}">
+                <a16:creationId xmlns:a16="http://schemas.microsoft.com/office/drawing/2014/main" id="{8D4DA232-F56D-D7E7-171E-99519F4859E1}"/>
+              </a:ext>
+            </a:extLst>
+          </p:cNvPr>
+          <p:cNvSpPr/>
+          <p:nvPr/>
+        </p:nvSpPr>
+        <p:spPr>
+          <a:xfrm>
+            <a:off x="5127171" y="1371600"/>
+            <a:ext cx="2177143" cy="674914"/>
+          </a:xfrm>
+          <a:prstGeom prst="roundRect">
+            <a:avLst/>
+          </a:prstGeom>
+        </p:spPr>
+        <p:style>
+          <a:lnRef idx="2">
+            <a:schemeClr val="accent1">
+              <a:shade val="15000"/>
+            </a:schemeClr>
+          </a:lnRef>
+          <a:fillRef idx="1">
+            <a:schemeClr val="accent1"/>
+          </a:fillRef>
+          <a:effectRef idx="0">
+            <a:schemeClr val="accent1"/>
+          </a:effectRef>
+          <a:fontRef idx="minor">
+            <a:schemeClr val="lt1"/>
+          </a:fontRef>
+        </p:style>
+        <p:txBody>
+          <a:bodyPr rtlCol="0" anchor="ctr"/>
+          <a:lstStyle/>
+          <a:p>
+            <a:pPr algn="ctr"/>
+            <a:r>
+              <a:rPr lang="en-US" dirty="0"/>
+              <a:t>App</a:t>
+            </a:r>
+          </a:p>
+        </p:txBody>
+      </p:sp>
+      <p:sp>
+        <p:nvSpPr>
+          <p:cNvPr id="6" name="Rounded Rectangle 5">
+            <a:extLst>
+              <a:ext uri="{FF2B5EF4-FFF2-40B4-BE49-F238E27FC236}">
+                <a16:creationId xmlns:a16="http://schemas.microsoft.com/office/drawing/2014/main" id="{CD9EDCA2-C3BC-80F0-75D8-915A40BD39AD}"/>
+              </a:ext>
+            </a:extLst>
+          </p:cNvPr>
+          <p:cNvSpPr/>
+          <p:nvPr/>
+        </p:nvSpPr>
+        <p:spPr>
+          <a:xfrm>
+            <a:off x="1142997" y="2819400"/>
+            <a:ext cx="2177143" cy="674914"/>
+          </a:xfrm>
+          <a:prstGeom prst="roundRect">
+            <a:avLst/>
+          </a:prstGeom>
+        </p:spPr>
+        <p:style>
+          <a:lnRef idx="2">
+            <a:schemeClr val="accent1">
+              <a:shade val="15000"/>
+            </a:schemeClr>
+          </a:lnRef>
+          <a:fillRef idx="1">
+            <a:schemeClr val="accent1"/>
+          </a:fillRef>
+          <a:effectRef idx="0">
+            <a:schemeClr val="accent1"/>
+          </a:effectRef>
+          <a:fontRef idx="minor">
+            <a:schemeClr val="lt1"/>
+          </a:fontRef>
+        </p:style>
+        <p:txBody>
+          <a:bodyPr rtlCol="0" anchor="ctr"/>
+          <a:lstStyle/>
+          <a:p>
+            <a:pPr algn="ctr"/>
+            <a:r>
+              <a:rPr lang="en-US" dirty="0"/>
+              <a:t>Header</a:t>
+            </a:r>
+          </a:p>
+        </p:txBody>
+      </p:sp>
+      <p:sp>
+        <p:nvSpPr>
+          <p:cNvPr id="7" name="Rounded Rectangle 6">
+            <a:extLst>
+              <a:ext uri="{FF2B5EF4-FFF2-40B4-BE49-F238E27FC236}">
+                <a16:creationId xmlns:a16="http://schemas.microsoft.com/office/drawing/2014/main" id="{77A60D5E-2E1F-05FE-B5B3-3D05EF16A9BD}"/>
+              </a:ext>
+            </a:extLst>
+          </p:cNvPr>
+          <p:cNvSpPr/>
+          <p:nvPr/>
+        </p:nvSpPr>
+        <p:spPr>
+          <a:xfrm>
+            <a:off x="5127169" y="2819400"/>
+            <a:ext cx="2177143" cy="674914"/>
+          </a:xfrm>
+          <a:prstGeom prst="roundRect">
+            <a:avLst/>
+          </a:prstGeom>
+        </p:spPr>
+        <p:style>
+          <a:lnRef idx="2">
+            <a:schemeClr val="accent1">
+              <a:shade val="15000"/>
+            </a:schemeClr>
+          </a:lnRef>
+          <a:fillRef idx="1">
+            <a:schemeClr val="accent1"/>
+          </a:fillRef>
+          <a:effectRef idx="0">
+            <a:schemeClr val="accent1"/>
+          </a:effectRef>
+          <a:fontRef idx="minor">
+            <a:schemeClr val="lt1"/>
+          </a:fontRef>
+        </p:style>
+        <p:txBody>
+          <a:bodyPr rtlCol="0" anchor="ctr"/>
+          <a:lstStyle/>
+          <a:p>
+            <a:pPr algn="ctr"/>
+            <a:r>
+              <a:rPr lang="en-US" dirty="0" err="1"/>
+              <a:t>TaskList</a:t>
+            </a:r>
+            <a:endParaRPr lang="en-US" dirty="0"/>
+          </a:p>
+        </p:txBody>
+      </p:sp>
+      <p:sp>
+        <p:nvSpPr>
+          <p:cNvPr id="8" name="Rounded Rectangle 7">
+            <a:extLst>
+              <a:ext uri="{FF2B5EF4-FFF2-40B4-BE49-F238E27FC236}">
+                <a16:creationId xmlns:a16="http://schemas.microsoft.com/office/drawing/2014/main" id="{F81374D7-F11F-AE5E-98FA-344E792768F2}"/>
+              </a:ext>
+            </a:extLst>
+          </p:cNvPr>
+          <p:cNvSpPr/>
+          <p:nvPr/>
+        </p:nvSpPr>
+        <p:spPr>
+          <a:xfrm>
+            <a:off x="8741228" y="2819400"/>
+            <a:ext cx="2177143" cy="674914"/>
+          </a:xfrm>
+          <a:prstGeom prst="roundRect">
+            <a:avLst/>
+          </a:prstGeom>
+        </p:spPr>
+        <p:style>
+          <a:lnRef idx="2">
+            <a:schemeClr val="accent1">
+              <a:shade val="15000"/>
+            </a:schemeClr>
+          </a:lnRef>
+          <a:fillRef idx="1">
+            <a:schemeClr val="accent1"/>
+          </a:fillRef>
+          <a:effectRef idx="0">
+            <a:schemeClr val="accent1"/>
+          </a:effectRef>
+          <a:fontRef idx="minor">
+            <a:schemeClr val="lt1"/>
+          </a:fontRef>
+        </p:style>
+        <p:txBody>
+          <a:bodyPr rtlCol="0" anchor="ctr"/>
+          <a:lstStyle/>
+          <a:p>
+            <a:pPr algn="ctr"/>
+            <a:r>
+              <a:rPr lang="en-US" dirty="0"/>
+              <a:t>Footer</a:t>
+            </a:r>
+          </a:p>
+        </p:txBody>
+      </p:sp>
+      <p:sp>
+        <p:nvSpPr>
+          <p:cNvPr id="9" name="Rounded Rectangle 8">
+            <a:extLst>
+              <a:ext uri="{FF2B5EF4-FFF2-40B4-BE49-F238E27FC236}">
+                <a16:creationId xmlns:a16="http://schemas.microsoft.com/office/drawing/2014/main" id="{EC7EB6E3-5FEC-A268-6D44-18528A5C5C56}"/>
+              </a:ext>
+            </a:extLst>
+          </p:cNvPr>
+          <p:cNvSpPr/>
+          <p:nvPr/>
+        </p:nvSpPr>
+        <p:spPr>
+          <a:xfrm>
+            <a:off x="5127168" y="4332514"/>
+            <a:ext cx="2177143" cy="674914"/>
+          </a:xfrm>
+          <a:prstGeom prst="roundRect">
+            <a:avLst/>
+          </a:prstGeom>
+        </p:spPr>
+        <p:style>
+          <a:lnRef idx="2">
+            <a:schemeClr val="accent1">
+              <a:shade val="15000"/>
+            </a:schemeClr>
+          </a:lnRef>
+          <a:fillRef idx="1">
+            <a:schemeClr val="accent1"/>
+          </a:fillRef>
+          <a:effectRef idx="0">
+            <a:schemeClr val="accent1"/>
+          </a:effectRef>
+          <a:fontRef idx="minor">
+            <a:schemeClr val="lt1"/>
+          </a:fontRef>
+        </p:style>
+        <p:txBody>
+          <a:bodyPr rtlCol="0" anchor="ctr"/>
+          <a:lstStyle/>
+          <a:p>
+            <a:pPr algn="ctr"/>
+            <a:r>
+              <a:rPr lang="en-US" dirty="0" err="1"/>
+              <a:t>TaskCard</a:t>
+            </a:r>
+            <a:endParaRPr lang="en-US" dirty="0"/>
+          </a:p>
+        </p:txBody>
+      </p:sp>
+      <p:cxnSp>
+        <p:nvCxnSpPr>
+          <p:cNvPr id="11" name="Straight Arrow Connector 10">
+            <a:extLst>
+              <a:ext uri="{FF2B5EF4-FFF2-40B4-BE49-F238E27FC236}">
+                <a16:creationId xmlns:a16="http://schemas.microsoft.com/office/drawing/2014/main" id="{4E0DB6FD-8F8D-9190-145D-CFEA3A3985E0}"/>
+              </a:ext>
+            </a:extLst>
+          </p:cNvPr>
+          <p:cNvCxnSpPr>
+            <a:stCxn id="4" idx="2"/>
+            <a:endCxn id="5" idx="0"/>
+          </p:cNvCxnSpPr>
+          <p:nvPr/>
+        </p:nvCxnSpPr>
+        <p:spPr>
+          <a:xfrm>
+            <a:off x="6215743" y="1142999"/>
+            <a:ext cx="0" cy="228601"/>
+          </a:xfrm>
+          <a:prstGeom prst="straightConnector1">
+            <a:avLst/>
+          </a:prstGeom>
+          <a:ln>
+            <a:tailEnd type="triangle"/>
+          </a:ln>
+        </p:spPr>
+        <p:style>
+          <a:lnRef idx="2">
+            <a:schemeClr val="accent1"/>
+          </a:lnRef>
+          <a:fillRef idx="0">
+            <a:schemeClr val="accent1"/>
+          </a:fillRef>
+          <a:effectRef idx="1">
+            <a:schemeClr val="accent1"/>
+          </a:effectRef>
+          <a:fontRef idx="minor">
+            <a:schemeClr val="tx1"/>
+          </a:fontRef>
+        </p:style>
+      </p:cxnSp>
+      <p:cxnSp>
+        <p:nvCxnSpPr>
+          <p:cNvPr id="13" name="Straight Arrow Connector 12">
+            <a:extLst>
+              <a:ext uri="{FF2B5EF4-FFF2-40B4-BE49-F238E27FC236}">
+                <a16:creationId xmlns:a16="http://schemas.microsoft.com/office/drawing/2014/main" id="{C3A57C16-9582-2C5B-562E-A5EADF5A1B9B}"/>
+              </a:ext>
+            </a:extLst>
+          </p:cNvPr>
+          <p:cNvCxnSpPr>
+            <a:stCxn id="5" idx="2"/>
+            <a:endCxn id="7" idx="0"/>
+          </p:cNvCxnSpPr>
+          <p:nvPr/>
+        </p:nvCxnSpPr>
+        <p:spPr>
+          <a:xfrm flipH="1">
+            <a:off x="6215741" y="2046514"/>
+            <a:ext cx="2" cy="772886"/>
+          </a:xfrm>
+          <a:prstGeom prst="straightConnector1">
+            <a:avLst/>
+          </a:prstGeom>
+          <a:ln>
+            <a:tailEnd type="triangle"/>
+          </a:ln>
+        </p:spPr>
+        <p:style>
+          <a:lnRef idx="2">
+            <a:schemeClr val="accent1"/>
+          </a:lnRef>
+          <a:fillRef idx="0">
+            <a:schemeClr val="accent1"/>
+          </a:fillRef>
+          <a:effectRef idx="1">
+            <a:schemeClr val="accent1"/>
+          </a:effectRef>
+          <a:fontRef idx="minor">
+            <a:schemeClr val="tx1"/>
+          </a:fontRef>
+        </p:style>
+      </p:cxnSp>
+      <p:cxnSp>
+        <p:nvCxnSpPr>
+          <p:cNvPr id="17" name="Elbow Connector 16">
+            <a:extLst>
+              <a:ext uri="{FF2B5EF4-FFF2-40B4-BE49-F238E27FC236}">
+                <a16:creationId xmlns:a16="http://schemas.microsoft.com/office/drawing/2014/main" id="{74D8B319-ED53-9C6E-48D3-5BD2A00FCAAD}"/>
+              </a:ext>
+            </a:extLst>
+          </p:cNvPr>
+          <p:cNvCxnSpPr>
+            <a:stCxn id="5" idx="2"/>
+            <a:endCxn id="6" idx="0"/>
+          </p:cNvCxnSpPr>
+          <p:nvPr/>
+        </p:nvCxnSpPr>
+        <p:spPr>
+          <a:xfrm rot="5400000">
+            <a:off x="3837213" y="440870"/>
+            <a:ext cx="772886" cy="3984174"/>
+          </a:xfrm>
+          <a:prstGeom prst="bentConnector3">
+            <a:avLst/>
+          </a:prstGeom>
+          <a:ln>
+            <a:tailEnd type="triangle"/>
+          </a:ln>
+        </p:spPr>
+        <p:style>
+          <a:lnRef idx="2">
+            <a:schemeClr val="accent1"/>
+          </a:lnRef>
+          <a:fillRef idx="0">
+            <a:schemeClr val="accent1"/>
+          </a:fillRef>
+          <a:effectRef idx="1">
+            <a:schemeClr val="accent1"/>
+          </a:effectRef>
+          <a:fontRef idx="minor">
+            <a:schemeClr val="tx1"/>
+          </a:fontRef>
+        </p:style>
+      </p:cxnSp>
+      <p:cxnSp>
+        <p:nvCxnSpPr>
+          <p:cNvPr id="19" name="Elbow Connector 18">
+            <a:extLst>
+              <a:ext uri="{FF2B5EF4-FFF2-40B4-BE49-F238E27FC236}">
+                <a16:creationId xmlns:a16="http://schemas.microsoft.com/office/drawing/2014/main" id="{D84369D0-AEE7-0C62-88ED-6B50AE718816}"/>
+              </a:ext>
+            </a:extLst>
+          </p:cNvPr>
+          <p:cNvCxnSpPr>
+            <a:stCxn id="5" idx="2"/>
+            <a:endCxn id="8" idx="0"/>
+          </p:cNvCxnSpPr>
+          <p:nvPr/>
+        </p:nvCxnSpPr>
+        <p:spPr>
+          <a:xfrm rot="16200000" flipH="1">
+            <a:off x="7636328" y="625928"/>
+            <a:ext cx="772886" cy="3614057"/>
+          </a:xfrm>
+          <a:prstGeom prst="bentConnector3">
+            <a:avLst/>
+          </a:prstGeom>
+          <a:ln>
+            <a:tailEnd type="triangle"/>
+          </a:ln>
+        </p:spPr>
+        <p:style>
+          <a:lnRef idx="2">
+            <a:schemeClr val="accent1"/>
+          </a:lnRef>
+          <a:fillRef idx="0">
+            <a:schemeClr val="accent1"/>
+          </a:fillRef>
+          <a:effectRef idx="1">
+            <a:schemeClr val="accent1"/>
+          </a:effectRef>
+          <a:fontRef idx="minor">
+            <a:schemeClr val="tx1"/>
+          </a:fontRef>
+        </p:style>
+      </p:cxnSp>
+      <p:cxnSp>
+        <p:nvCxnSpPr>
+          <p:cNvPr id="24" name="Elbow Connector 23">
+            <a:extLst>
+              <a:ext uri="{FF2B5EF4-FFF2-40B4-BE49-F238E27FC236}">
+                <a16:creationId xmlns:a16="http://schemas.microsoft.com/office/drawing/2014/main" id="{6B053B87-FA39-B8B5-DC05-ECAF02E9FE24}"/>
+              </a:ext>
+            </a:extLst>
+          </p:cNvPr>
+          <p:cNvCxnSpPr>
+            <a:stCxn id="7" idx="2"/>
+            <a:endCxn id="9" idx="0"/>
+          </p:cNvCxnSpPr>
+          <p:nvPr/>
+        </p:nvCxnSpPr>
+        <p:spPr>
+          <a:xfrm rot="5400000">
+            <a:off x="5796641" y="3913414"/>
+            <a:ext cx="838200" cy="1"/>
+          </a:xfrm>
+          <a:prstGeom prst="bentConnector3">
+            <a:avLst/>
+          </a:prstGeom>
+          <a:ln>
+            <a:tailEnd type="triangle"/>
+          </a:ln>
+        </p:spPr>
+        <p:style>
+          <a:lnRef idx="2">
+            <a:schemeClr val="accent1"/>
+          </a:lnRef>
+          <a:fillRef idx="0">
+            <a:schemeClr val="accent1"/>
+          </a:fillRef>
+          <a:effectRef idx="1">
+            <a:schemeClr val="accent1"/>
+          </a:effectRef>
+          <a:fontRef idx="minor">
+            <a:schemeClr val="tx1"/>
+          </a:fontRef>
+        </p:style>
+      </p:cxnSp>
+      <p:sp>
+        <p:nvSpPr>
+          <p:cNvPr id="26" name="TextBox 25">
+            <a:extLst>
+              <a:ext uri="{FF2B5EF4-FFF2-40B4-BE49-F238E27FC236}">
+                <a16:creationId xmlns:a16="http://schemas.microsoft.com/office/drawing/2014/main" id="{86D7E361-167C-0B45-F6D5-A7C547B79778}"/>
+              </a:ext>
+            </a:extLst>
+          </p:cNvPr>
+          <p:cNvSpPr txBox="1"/>
+          <p:nvPr/>
+        </p:nvSpPr>
+        <p:spPr>
+          <a:xfrm rot="16200000">
+            <a:off x="5519061" y="3766846"/>
+            <a:ext cx="914399" cy="369332"/>
+          </a:xfrm>
+          <a:prstGeom prst="rect">
+            <a:avLst/>
+          </a:prstGeom>
+          <a:noFill/>
+        </p:spPr>
+        <p:txBody>
+          <a:bodyPr wrap="square" rtlCol="0">
+            <a:spAutoFit/>
+          </a:bodyPr>
+          <a:lstStyle/>
+          <a:p>
+            <a:r>
+              <a:rPr lang="en-US" dirty="0"/>
+              <a:t>props</a:t>
+            </a:r>
+          </a:p>
+        </p:txBody>
+      </p:sp>
+    </p:spTree>
+    <p:extLst>
+      <p:ext uri="{BB962C8B-B14F-4D97-AF65-F5344CB8AC3E}">
+        <p14:creationId xmlns:p14="http://schemas.microsoft.com/office/powerpoint/2010/main" val="2947726036"/>
+      </p:ext>
+    </p:extLst>
+  </p:cSld>
+  <p:clrMapOvr>
+    <a:masterClrMapping/>
+  </p:clrMapOvr>
+</p:sld>
+</file>
+
+<file path=ppt/slides/slide6.xml><?xml version="1.0" encoding="utf-8"?>
+<p:sld xmlns:a="http://schemas.openxmlformats.org/drawingml/2006/main" xmlns:r="http://schemas.openxmlformats.org/officeDocument/2006/relationships" xmlns:p="http://schemas.openxmlformats.org/presentationml/2006/main">
+  <p:cSld>
+    <p:spTree>
+      <p:nvGrpSpPr>
+        <p:cNvPr id="1" name=""/>
+        <p:cNvGrpSpPr/>
+        <p:nvPr/>
+      </p:nvGrpSpPr>
+      <p:grpSpPr>
+        <a:xfrm>
+          <a:off x="0" y="0"/>
+          <a:ext cx="0" cy="0"/>
+          <a:chOff x="0" y="0"/>
+          <a:chExt cx="0" cy="0"/>
+        </a:xfrm>
+      </p:grpSpPr>
+      <p:sp>
+        <p:nvSpPr>
+          <p:cNvPr id="3" name="Content Placeholder 2">
+            <a:extLst>
+              <a:ext uri="{FF2B5EF4-FFF2-40B4-BE49-F238E27FC236}">
+                <a16:creationId xmlns:a16="http://schemas.microsoft.com/office/drawing/2014/main" id="{CD6FC8A5-11B2-DA38-45D8-CD20FF8AE58D}"/>
+              </a:ext>
+            </a:extLst>
+          </p:cNvPr>
+          <p:cNvSpPr>
+            <a:spLocks noGrp="1"/>
+          </p:cNvSpPr>
+          <p:nvPr>
+            <p:ph idx="1"/>
+          </p:nvPr>
+        </p:nvSpPr>
+        <p:spPr>
+          <a:xfrm>
+            <a:off x="838200" y="152400"/>
+            <a:ext cx="10515600" cy="6024563"/>
+          </a:xfrm>
+        </p:spPr>
+        <p:txBody>
+          <a:bodyPr>
+            <a:normAutofit lnSpcReduction="10000"/>
+          </a:bodyPr>
+          <a:lstStyle/>
+          <a:p>
+            <a:r>
+              <a:rPr lang="en-US" dirty="0"/>
+              <a:t>Props Children</a:t>
+            </a:r>
+          </a:p>
+          <a:p>
+            <a:r>
+              <a:rPr lang="en-US" dirty="0"/>
+              <a:t>Props Drilling</a:t>
+            </a:r>
+          </a:p>
+          <a:p>
+            <a:r>
+              <a:rPr lang="en-US" dirty="0"/>
+              <a:t>Global Level Styling</a:t>
+            </a:r>
+          </a:p>
+          <a:p>
+            <a:r>
+              <a:rPr lang="en-US" dirty="0"/>
+              <a:t>Component Level Styling</a:t>
+            </a:r>
+          </a:p>
+          <a:p>
+            <a:r>
+              <a:rPr lang="en-US" dirty="0"/>
+              <a:t>Inline Level Styling</a:t>
+            </a:r>
+          </a:p>
+          <a:p>
+            <a:r>
+              <a:rPr lang="en-US" dirty="0"/>
+              <a:t>Dynamic Level Styling</a:t>
+            </a:r>
+          </a:p>
+          <a:p>
+            <a:r>
+              <a:rPr lang="en-US" dirty="0"/>
+              <a:t>Module Level Styling</a:t>
+            </a:r>
+          </a:p>
+          <a:p>
+            <a:r>
+              <a:rPr lang="en-US" dirty="0"/>
+              <a:t>Form &amp; Input</a:t>
+            </a:r>
+          </a:p>
+          <a:p>
+            <a:r>
+              <a:rPr lang="en-US" dirty="0" err="1"/>
+              <a:t>onChange</a:t>
+            </a:r>
+            <a:r>
+              <a:rPr lang="en-US" dirty="0"/>
+              <a:t> Event</a:t>
+            </a:r>
+          </a:p>
+          <a:p>
+            <a:r>
+              <a:rPr lang="en-US" dirty="0"/>
+              <a:t>Controlled Inputs</a:t>
+            </a:r>
+          </a:p>
+          <a:p>
+            <a:r>
+              <a:rPr lang="en-US" dirty="0" err="1"/>
+              <a:t>onSubmit</a:t>
+            </a:r>
+            <a:r>
+              <a:rPr lang="en-US" dirty="0"/>
+              <a:t> Event</a:t>
+            </a:r>
+          </a:p>
+          <a:p>
+            <a:r>
+              <a:rPr lang="en-US"/>
+              <a:t>Add New </a:t>
+            </a:r>
+            <a:r>
+              <a:rPr lang="en-US" dirty="0"/>
+              <a:t>Task</a:t>
+            </a:r>
+          </a:p>
+        </p:txBody>
+      </p:sp>
+    </p:spTree>
+    <p:extLst>
+      <p:ext uri="{BB962C8B-B14F-4D97-AF65-F5344CB8AC3E}">
+        <p14:creationId xmlns:p14="http://schemas.microsoft.com/office/powerpoint/2010/main" val="2929752155"/>
       </p:ext>
     </p:extLst>
   </p:cSld>

--- a/ReactJS/Reactjs.pptx
+++ b/ReactJS/Reactjs.pptx
@@ -11,6 +11,10 @@
     <p:sldId id="259" r:id="rId5"/>
     <p:sldId id="260" r:id="rId6"/>
     <p:sldId id="261" r:id="rId7"/>
+    <p:sldId id="262" r:id="rId8"/>
+    <p:sldId id="263" r:id="rId9"/>
+    <p:sldId id="264" r:id="rId10"/>
+    <p:sldId id="265" r:id="rId11"/>
   </p:sldIdLst>
   <p:sldSz cx="12192000" cy="6858000"/>
   <p:notesSz cx="6858000" cy="9144000"/>
@@ -266,7 +270,7 @@
           <a:p>
             <a:fld id="{E604A9DE-5D16-5148-A31A-5AFF5E45A3E1}" type="datetimeFigureOut">
               <a:rPr lang="en-US" smtClean="0"/>
-              <a:t>4/3/26</a:t>
+              <a:t>4/15/26</a:t>
             </a:fld>
             <a:endParaRPr lang="en-US"/>
           </a:p>
@@ -466,7 +470,7 @@
           <a:p>
             <a:fld id="{E604A9DE-5D16-5148-A31A-5AFF5E45A3E1}" type="datetimeFigureOut">
               <a:rPr lang="en-US" smtClean="0"/>
-              <a:t>4/3/26</a:t>
+              <a:t>4/15/26</a:t>
             </a:fld>
             <a:endParaRPr lang="en-US"/>
           </a:p>
@@ -676,7 +680,7 @@
           <a:p>
             <a:fld id="{E604A9DE-5D16-5148-A31A-5AFF5E45A3E1}" type="datetimeFigureOut">
               <a:rPr lang="en-US" smtClean="0"/>
-              <a:t>4/3/26</a:t>
+              <a:t>4/15/26</a:t>
             </a:fld>
             <a:endParaRPr lang="en-US"/>
           </a:p>
@@ -876,7 +880,7 @@
           <a:p>
             <a:fld id="{E604A9DE-5D16-5148-A31A-5AFF5E45A3E1}" type="datetimeFigureOut">
               <a:rPr lang="en-US" smtClean="0"/>
-              <a:t>4/3/26</a:t>
+              <a:t>4/15/26</a:t>
             </a:fld>
             <a:endParaRPr lang="en-US"/>
           </a:p>
@@ -1152,7 +1156,7 @@
           <a:p>
             <a:fld id="{E604A9DE-5D16-5148-A31A-5AFF5E45A3E1}" type="datetimeFigureOut">
               <a:rPr lang="en-US" smtClean="0"/>
-              <a:t>4/3/26</a:t>
+              <a:t>4/15/26</a:t>
             </a:fld>
             <a:endParaRPr lang="en-US"/>
           </a:p>
@@ -1420,7 +1424,7 @@
           <a:p>
             <a:fld id="{E604A9DE-5D16-5148-A31A-5AFF5E45A3E1}" type="datetimeFigureOut">
               <a:rPr lang="en-US" smtClean="0"/>
-              <a:t>4/3/26</a:t>
+              <a:t>4/15/26</a:t>
             </a:fld>
             <a:endParaRPr lang="en-US"/>
           </a:p>
@@ -1835,7 +1839,7 @@
           <a:p>
             <a:fld id="{E604A9DE-5D16-5148-A31A-5AFF5E45A3E1}" type="datetimeFigureOut">
               <a:rPr lang="en-US" smtClean="0"/>
-              <a:t>4/3/26</a:t>
+              <a:t>4/15/26</a:t>
             </a:fld>
             <a:endParaRPr lang="en-US"/>
           </a:p>
@@ -1977,7 +1981,7 @@
           <a:p>
             <a:fld id="{E604A9DE-5D16-5148-A31A-5AFF5E45A3E1}" type="datetimeFigureOut">
               <a:rPr lang="en-US" smtClean="0"/>
-              <a:t>4/3/26</a:t>
+              <a:t>4/15/26</a:t>
             </a:fld>
             <a:endParaRPr lang="en-US"/>
           </a:p>
@@ -2090,7 +2094,7 @@
           <a:p>
             <a:fld id="{E604A9DE-5D16-5148-A31A-5AFF5E45A3E1}" type="datetimeFigureOut">
               <a:rPr lang="en-US" smtClean="0"/>
-              <a:t>4/3/26</a:t>
+              <a:t>4/15/26</a:t>
             </a:fld>
             <a:endParaRPr lang="en-US"/>
           </a:p>
@@ -2403,7 +2407,7 @@
           <a:p>
             <a:fld id="{E604A9DE-5D16-5148-A31A-5AFF5E45A3E1}" type="datetimeFigureOut">
               <a:rPr lang="en-US" smtClean="0"/>
-              <a:t>4/3/26</a:t>
+              <a:t>4/15/26</a:t>
             </a:fld>
             <a:endParaRPr lang="en-US"/>
           </a:p>
@@ -2692,7 +2696,7 @@
           <a:p>
             <a:fld id="{E604A9DE-5D16-5148-A31A-5AFF5E45A3E1}" type="datetimeFigureOut">
               <a:rPr lang="en-US" smtClean="0"/>
-              <a:t>4/3/26</a:t>
+              <a:t>4/15/26</a:t>
             </a:fld>
             <a:endParaRPr lang="en-US"/>
           </a:p>
@@ -2935,7 +2939,7 @@
           <a:p>
             <a:fld id="{E604A9DE-5D16-5148-A31A-5AFF5E45A3E1}" type="datetimeFigureOut">
               <a:rPr lang="en-US" smtClean="0"/>
-              <a:t>4/3/26</a:t>
+              <a:t>4/15/26</a:t>
             </a:fld>
             <a:endParaRPr lang="en-US"/>
           </a:p>
@@ -3448,6 +3452,96 @@
 </p:sld>
 </file>
 
+<file path=ppt/slides/slide10.xml><?xml version="1.0" encoding="utf-8"?>
+<p:sld xmlns:a="http://schemas.openxmlformats.org/drawingml/2006/main" xmlns:r="http://schemas.openxmlformats.org/officeDocument/2006/relationships" xmlns:p="http://schemas.openxmlformats.org/presentationml/2006/main">
+  <p:cSld>
+    <p:spTree>
+      <p:nvGrpSpPr>
+        <p:cNvPr id="1" name=""/>
+        <p:cNvGrpSpPr/>
+        <p:nvPr/>
+      </p:nvGrpSpPr>
+      <p:grpSpPr>
+        <a:xfrm>
+          <a:off x="0" y="0"/>
+          <a:ext cx="0" cy="0"/>
+          <a:chOff x="0" y="0"/>
+          <a:chExt cx="0" cy="0"/>
+        </a:xfrm>
+      </p:grpSpPr>
+      <p:sp>
+        <p:nvSpPr>
+          <p:cNvPr id="2" name="TextBox 1">
+            <a:extLst>
+              <a:ext uri="{FF2B5EF4-FFF2-40B4-BE49-F238E27FC236}">
+                <a16:creationId xmlns:a16="http://schemas.microsoft.com/office/drawing/2014/main" id="{0CEB28BC-371A-2388-9C6E-902B62CBAA6E}"/>
+              </a:ext>
+            </a:extLst>
+          </p:cNvPr>
+          <p:cNvSpPr txBox="1"/>
+          <p:nvPr/>
+        </p:nvSpPr>
+        <p:spPr>
+          <a:xfrm>
+            <a:off x="841664" y="550718"/>
+            <a:ext cx="2748894" cy="923330"/>
+          </a:xfrm>
+          <a:prstGeom prst="rect">
+            <a:avLst/>
+          </a:prstGeom>
+          <a:noFill/>
+        </p:spPr>
+        <p:txBody>
+          <a:bodyPr wrap="none" rtlCol="0">
+            <a:spAutoFit/>
+          </a:bodyPr>
+          <a:lstStyle/>
+          <a:p>
+            <a:r>
+              <a:rPr lang="en-US" dirty="0"/>
+              <a:t>Project Structure</a:t>
+            </a:r>
+          </a:p>
+          <a:p>
+            <a:r>
+              <a:rPr lang="en-US" dirty="0"/>
+              <a:t>Components</a:t>
+            </a:r>
+          </a:p>
+          <a:p>
+            <a:r>
+              <a:rPr lang="en-US" dirty="0"/>
+              <a:t>State </a:t>
+            </a:r>
+            <a:r>
+              <a:rPr lang="en-US" dirty="0" err="1"/>
+              <a:t>tasklist</a:t>
+            </a:r>
+            <a:r>
+              <a:rPr lang="en-US" dirty="0"/>
+              <a:t> &amp; </a:t>
+            </a:r>
+            <a:r>
+              <a:rPr lang="en-US" dirty="0" err="1"/>
+              <a:t>setTasklist</a:t>
+            </a:r>
+            <a:endParaRPr lang="en-US" dirty="0"/>
+          </a:p>
+        </p:txBody>
+      </p:sp>
+    </p:spTree>
+    <p:extLst>
+      <p:ext uri="{BB962C8B-B14F-4D97-AF65-F5344CB8AC3E}">
+        <p14:creationId xmlns:p14="http://schemas.microsoft.com/office/powerpoint/2010/main" val="828786990"/>
+      </p:ext>
+    </p:extLst>
+  </p:cSld>
+  <p:clrMapOvr>
+    <a:masterClrMapping/>
+  </p:clrMapOvr>
+</p:sld>
+</file>
+
 <file path=ppt/slides/slide2.xml><?xml version="1.0" encoding="utf-8"?>
 <p:sld xmlns:a="http://schemas.openxmlformats.org/drawingml/2006/main" xmlns:r="http://schemas.openxmlformats.org/officeDocument/2006/relationships" xmlns:p="http://schemas.openxmlformats.org/presentationml/2006/main">
   <p:cSld>
@@ -4432,7 +4526,7 @@
           </a:xfrm>
         </p:spPr>
         <p:txBody>
-          <a:bodyPr>
+          <a:bodyPr numCol="2">
             <a:normAutofit lnSpcReduction="10000"/>
           </a:bodyPr>
           <a:lstStyle/>
@@ -4512,12 +4606,111 @@
           </a:p>
           <a:p>
             <a:r>
-              <a:rPr lang="en-US"/>
-              <a:t>Add New </a:t>
-            </a:r>
-            <a:r>
-              <a:rPr lang="en-US" dirty="0"/>
-              <a:t>Task</a:t>
+              <a:rPr lang="en-US" dirty="0"/>
+              <a:t>Add New Task</a:t>
+            </a:r>
+          </a:p>
+          <a:p>
+            <a:r>
+              <a:rPr lang="en-US" dirty="0" err="1"/>
+              <a:t>useRef</a:t>
+            </a:r>
+            <a:r>
+              <a:rPr lang="en-US" dirty="0"/>
+              <a:t> Hook</a:t>
+            </a:r>
+          </a:p>
+          <a:p>
+            <a:r>
+              <a:rPr lang="en-US" dirty="0"/>
+              <a:t>Json Server – </a:t>
+            </a:r>
+          </a:p>
+          <a:p>
+            <a:pPr lvl="1"/>
+            <a:r>
+              <a:rPr lang="en-US" dirty="0" err="1"/>
+              <a:t>json</a:t>
+            </a:r>
+            <a:r>
+              <a:rPr lang="en-US" dirty="0"/>
+              <a:t>-server --watch data/</a:t>
+            </a:r>
+            <a:r>
+              <a:rPr lang="en-US" dirty="0" err="1"/>
+              <a:t>db.json</a:t>
+            </a:r>
+            <a:r>
+              <a:rPr lang="en-US" dirty="0"/>
+              <a:t> --port 4000</a:t>
+            </a:r>
+          </a:p>
+          <a:p>
+            <a:r>
+              <a:rPr lang="en-US" dirty="0" err="1"/>
+              <a:t>useEffect</a:t>
+            </a:r>
+            <a:endParaRPr lang="en-US" dirty="0"/>
+          </a:p>
+          <a:p>
+            <a:r>
+              <a:rPr lang="en-US" dirty="0"/>
+              <a:t>List Output</a:t>
+            </a:r>
+          </a:p>
+          <a:p>
+            <a:r>
+              <a:rPr lang="en-US" dirty="0" err="1"/>
+              <a:t>onClick</a:t>
+            </a:r>
+            <a:r>
+              <a:rPr lang="en-US" dirty="0"/>
+              <a:t> Event</a:t>
+            </a:r>
+          </a:p>
+          <a:p>
+            <a:r>
+              <a:rPr lang="en-US" dirty="0" err="1"/>
+              <a:t>useCallback</a:t>
+            </a:r>
+            <a:endParaRPr lang="en-US" dirty="0"/>
+          </a:p>
+          <a:p>
+            <a:r>
+              <a:rPr lang="en-US" dirty="0"/>
+              <a:t>Custom hook</a:t>
+            </a:r>
+          </a:p>
+          <a:p>
+            <a:r>
+              <a:rPr lang="en-US" dirty="0"/>
+              <a:t>Loading State</a:t>
+            </a:r>
+          </a:p>
+          <a:p>
+            <a:r>
+              <a:rPr lang="en-US" dirty="0"/>
+              <a:t>Handling Errors (</a:t>
+            </a:r>
+            <a:r>
+              <a:rPr lang="en-US" dirty="0" err="1"/>
+              <a:t>trycatch</a:t>
+            </a:r>
+            <a:r>
+              <a:rPr lang="en-US" dirty="0"/>
+              <a:t>)</a:t>
+            </a:r>
+          </a:p>
+          <a:p>
+            <a:r>
+              <a:rPr lang="en-US" dirty="0"/>
+              <a:t>Aborting Fetch Request</a:t>
+            </a:r>
+          </a:p>
+          <a:p>
+            <a:r>
+              <a:rPr lang="en-US" dirty="0"/>
+              <a:t>Infinite Loops</a:t>
             </a:r>
           </a:p>
         </p:txBody>
@@ -4526,6 +4719,2107 @@
     <p:extLst>
       <p:ext uri="{BB962C8B-B14F-4D97-AF65-F5344CB8AC3E}">
         <p14:creationId xmlns:p14="http://schemas.microsoft.com/office/powerpoint/2010/main" val="2929752155"/>
+      </p:ext>
+    </p:extLst>
+  </p:cSld>
+  <p:clrMapOvr>
+    <a:masterClrMapping/>
+  </p:clrMapOvr>
+</p:sld>
+</file>
+
+<file path=ppt/slides/slide7.xml><?xml version="1.0" encoding="utf-8"?>
+<p:sld xmlns:a="http://schemas.openxmlformats.org/drawingml/2006/main" xmlns:r="http://schemas.openxmlformats.org/officeDocument/2006/relationships" xmlns:p="http://schemas.openxmlformats.org/presentationml/2006/main">
+  <p:cSld>
+    <p:spTree>
+      <p:nvGrpSpPr>
+        <p:cNvPr id="1" name=""/>
+        <p:cNvGrpSpPr/>
+        <p:nvPr/>
+      </p:nvGrpSpPr>
+      <p:grpSpPr>
+        <a:xfrm>
+          <a:off x="0" y="0"/>
+          <a:ext cx="0" cy="0"/>
+          <a:chOff x="0" y="0"/>
+          <a:chExt cx="0" cy="0"/>
+        </a:xfrm>
+      </p:grpSpPr>
+      <p:sp>
+        <p:nvSpPr>
+          <p:cNvPr id="4" name="Rectangle 3">
+            <a:extLst>
+              <a:ext uri="{FF2B5EF4-FFF2-40B4-BE49-F238E27FC236}">
+                <a16:creationId xmlns:a16="http://schemas.microsoft.com/office/drawing/2014/main" id="{F9878405-7A73-94A2-249C-BAC07061A2E6}"/>
+              </a:ext>
+            </a:extLst>
+          </p:cNvPr>
+          <p:cNvSpPr/>
+          <p:nvPr/>
+        </p:nvSpPr>
+        <p:spPr>
+          <a:xfrm>
+            <a:off x="691116" y="372141"/>
+            <a:ext cx="1605517" cy="627320"/>
+          </a:xfrm>
+          <a:prstGeom prst="rect">
+            <a:avLst/>
+          </a:prstGeom>
+        </p:spPr>
+        <p:style>
+          <a:lnRef idx="2">
+            <a:schemeClr val="accent1">
+              <a:shade val="15000"/>
+            </a:schemeClr>
+          </a:lnRef>
+          <a:fillRef idx="1">
+            <a:schemeClr val="accent1"/>
+          </a:fillRef>
+          <a:effectRef idx="0">
+            <a:schemeClr val="accent1"/>
+          </a:effectRef>
+          <a:fontRef idx="minor">
+            <a:schemeClr val="lt1"/>
+          </a:fontRef>
+        </p:style>
+        <p:txBody>
+          <a:bodyPr rtlCol="0" anchor="ctr"/>
+          <a:lstStyle/>
+          <a:p>
+            <a:pPr algn="ctr"/>
+            <a:r>
+              <a:rPr lang="en-US" dirty="0"/>
+              <a:t>JavaScript</a:t>
+            </a:r>
+          </a:p>
+        </p:txBody>
+      </p:sp>
+      <p:sp>
+        <p:nvSpPr>
+          <p:cNvPr id="5" name="Rectangle 4">
+            <a:extLst>
+              <a:ext uri="{FF2B5EF4-FFF2-40B4-BE49-F238E27FC236}">
+                <a16:creationId xmlns:a16="http://schemas.microsoft.com/office/drawing/2014/main" id="{348A2943-97AF-F17B-58F1-FDC2CB758D4A}"/>
+              </a:ext>
+            </a:extLst>
+          </p:cNvPr>
+          <p:cNvSpPr/>
+          <p:nvPr/>
+        </p:nvSpPr>
+        <p:spPr>
+          <a:xfrm>
+            <a:off x="3076354" y="999461"/>
+            <a:ext cx="2484474" cy="627320"/>
+          </a:xfrm>
+          <a:prstGeom prst="rect">
+            <a:avLst/>
+          </a:prstGeom>
+        </p:spPr>
+        <p:style>
+          <a:lnRef idx="2">
+            <a:schemeClr val="accent1">
+              <a:shade val="15000"/>
+            </a:schemeClr>
+          </a:lnRef>
+          <a:fillRef idx="1">
+            <a:schemeClr val="accent1"/>
+          </a:fillRef>
+          <a:effectRef idx="0">
+            <a:schemeClr val="accent1"/>
+          </a:effectRef>
+          <a:fontRef idx="minor">
+            <a:schemeClr val="lt1"/>
+          </a:fontRef>
+        </p:style>
+        <p:txBody>
+          <a:bodyPr rtlCol="0" anchor="ctr"/>
+          <a:lstStyle/>
+          <a:p>
+            <a:pPr algn="ctr"/>
+            <a:r>
+              <a:rPr lang="en-US" dirty="0"/>
+              <a:t>Synchronous</a:t>
+            </a:r>
+          </a:p>
+        </p:txBody>
+      </p:sp>
+      <p:sp>
+        <p:nvSpPr>
+          <p:cNvPr id="6" name="Rectangle 5">
+            <a:extLst>
+              <a:ext uri="{FF2B5EF4-FFF2-40B4-BE49-F238E27FC236}">
+                <a16:creationId xmlns:a16="http://schemas.microsoft.com/office/drawing/2014/main" id="{A3F31D43-BFCA-3110-7D96-69D5A7E6EEF1}"/>
+              </a:ext>
+            </a:extLst>
+          </p:cNvPr>
+          <p:cNvSpPr/>
+          <p:nvPr/>
+        </p:nvSpPr>
+        <p:spPr>
+          <a:xfrm>
+            <a:off x="3076354" y="1853609"/>
+            <a:ext cx="2484474" cy="627320"/>
+          </a:xfrm>
+          <a:prstGeom prst="rect">
+            <a:avLst/>
+          </a:prstGeom>
+        </p:spPr>
+        <p:style>
+          <a:lnRef idx="2">
+            <a:schemeClr val="accent1">
+              <a:shade val="15000"/>
+            </a:schemeClr>
+          </a:lnRef>
+          <a:fillRef idx="1">
+            <a:schemeClr val="accent1"/>
+          </a:fillRef>
+          <a:effectRef idx="0">
+            <a:schemeClr val="accent1"/>
+          </a:effectRef>
+          <a:fontRef idx="minor">
+            <a:schemeClr val="lt1"/>
+          </a:fontRef>
+        </p:style>
+        <p:txBody>
+          <a:bodyPr rtlCol="0" anchor="ctr"/>
+          <a:lstStyle/>
+          <a:p>
+            <a:pPr algn="ctr"/>
+            <a:r>
+              <a:rPr lang="en-US" dirty="0"/>
+              <a:t>Single threaded</a:t>
+            </a:r>
+          </a:p>
+        </p:txBody>
+      </p:sp>
+      <p:sp>
+        <p:nvSpPr>
+          <p:cNvPr id="7" name="Rectangle 6">
+            <a:extLst>
+              <a:ext uri="{FF2B5EF4-FFF2-40B4-BE49-F238E27FC236}">
+                <a16:creationId xmlns:a16="http://schemas.microsoft.com/office/drawing/2014/main" id="{E3F750D7-7BA0-263C-92A5-D243A9848393}"/>
+              </a:ext>
+            </a:extLst>
+          </p:cNvPr>
+          <p:cNvSpPr/>
+          <p:nvPr/>
+        </p:nvSpPr>
+        <p:spPr>
+          <a:xfrm>
+            <a:off x="545804" y="3012560"/>
+            <a:ext cx="1605517" cy="627320"/>
+          </a:xfrm>
+          <a:prstGeom prst="rect">
+            <a:avLst/>
+          </a:prstGeom>
+        </p:spPr>
+        <p:style>
+          <a:lnRef idx="2">
+            <a:schemeClr val="accent1">
+              <a:shade val="15000"/>
+            </a:schemeClr>
+          </a:lnRef>
+          <a:fillRef idx="1">
+            <a:schemeClr val="accent1"/>
+          </a:fillRef>
+          <a:effectRef idx="0">
+            <a:schemeClr val="accent1"/>
+          </a:effectRef>
+          <a:fontRef idx="minor">
+            <a:schemeClr val="lt1"/>
+          </a:fontRef>
+        </p:style>
+        <p:txBody>
+          <a:bodyPr rtlCol="0" anchor="ctr"/>
+          <a:lstStyle/>
+          <a:p>
+            <a:pPr algn="ctr"/>
+            <a:r>
+              <a:rPr lang="en-US" dirty="0"/>
+              <a:t>Execution Context</a:t>
+            </a:r>
+          </a:p>
+        </p:txBody>
+      </p:sp>
+      <p:sp>
+        <p:nvSpPr>
+          <p:cNvPr id="8" name="Rectangle 7">
+            <a:extLst>
+              <a:ext uri="{FF2B5EF4-FFF2-40B4-BE49-F238E27FC236}">
+                <a16:creationId xmlns:a16="http://schemas.microsoft.com/office/drawing/2014/main" id="{D98C8358-8A6A-60A8-800E-6FDE34C43E4A}"/>
+              </a:ext>
+            </a:extLst>
+          </p:cNvPr>
+          <p:cNvSpPr/>
+          <p:nvPr/>
+        </p:nvSpPr>
+        <p:spPr>
+          <a:xfrm>
+            <a:off x="2931042" y="3639880"/>
+            <a:ext cx="4192772" cy="627320"/>
+          </a:xfrm>
+          <a:prstGeom prst="rect">
+            <a:avLst/>
+          </a:prstGeom>
+        </p:spPr>
+        <p:style>
+          <a:lnRef idx="2">
+            <a:schemeClr val="accent1">
+              <a:shade val="15000"/>
+            </a:schemeClr>
+          </a:lnRef>
+          <a:fillRef idx="1">
+            <a:schemeClr val="accent1"/>
+          </a:fillRef>
+          <a:effectRef idx="0">
+            <a:schemeClr val="accent1"/>
+          </a:effectRef>
+          <a:fontRef idx="minor">
+            <a:schemeClr val="lt1"/>
+          </a:fontRef>
+        </p:style>
+        <p:txBody>
+          <a:bodyPr rtlCol="0" anchor="ctr"/>
+          <a:lstStyle/>
+          <a:p>
+            <a:pPr algn="ctr"/>
+            <a:r>
+              <a:rPr lang="en-US" dirty="0"/>
+              <a:t>Execute one line of code at a time</a:t>
+            </a:r>
+          </a:p>
+        </p:txBody>
+      </p:sp>
+      <p:sp>
+        <p:nvSpPr>
+          <p:cNvPr id="9" name="Rectangle 8">
+            <a:extLst>
+              <a:ext uri="{FF2B5EF4-FFF2-40B4-BE49-F238E27FC236}">
+                <a16:creationId xmlns:a16="http://schemas.microsoft.com/office/drawing/2014/main" id="{43CFABBC-F05C-957C-8054-A837C7C597A7}"/>
+              </a:ext>
+            </a:extLst>
+          </p:cNvPr>
+          <p:cNvSpPr/>
+          <p:nvPr/>
+        </p:nvSpPr>
+        <p:spPr>
+          <a:xfrm>
+            <a:off x="2931042" y="4494028"/>
+            <a:ext cx="1605517" cy="627320"/>
+          </a:xfrm>
+          <a:prstGeom prst="rect">
+            <a:avLst/>
+          </a:prstGeom>
+        </p:spPr>
+        <p:style>
+          <a:lnRef idx="2">
+            <a:schemeClr val="accent1">
+              <a:shade val="15000"/>
+            </a:schemeClr>
+          </a:lnRef>
+          <a:fillRef idx="1">
+            <a:schemeClr val="accent1"/>
+          </a:fillRef>
+          <a:effectRef idx="0">
+            <a:schemeClr val="accent1"/>
+          </a:effectRef>
+          <a:fontRef idx="minor">
+            <a:schemeClr val="lt1"/>
+          </a:fontRef>
+        </p:style>
+        <p:txBody>
+          <a:bodyPr rtlCol="0" anchor="ctr"/>
+          <a:lstStyle/>
+          <a:p>
+            <a:pPr algn="ctr"/>
+            <a:r>
+              <a:rPr lang="en-US" dirty="0"/>
+              <a:t>Console -1</a:t>
+            </a:r>
+          </a:p>
+        </p:txBody>
+      </p:sp>
+      <p:sp>
+        <p:nvSpPr>
+          <p:cNvPr id="10" name="Rectangle 9">
+            <a:extLst>
+              <a:ext uri="{FF2B5EF4-FFF2-40B4-BE49-F238E27FC236}">
+                <a16:creationId xmlns:a16="http://schemas.microsoft.com/office/drawing/2014/main" id="{C571239A-8C34-366D-0D59-7A16CF6CD4E8}"/>
+              </a:ext>
+            </a:extLst>
+          </p:cNvPr>
+          <p:cNvSpPr/>
+          <p:nvPr/>
+        </p:nvSpPr>
+        <p:spPr>
+          <a:xfrm>
+            <a:off x="2931042" y="5511208"/>
+            <a:ext cx="1605517" cy="627320"/>
+          </a:xfrm>
+          <a:prstGeom prst="rect">
+            <a:avLst/>
+          </a:prstGeom>
+        </p:spPr>
+        <p:style>
+          <a:lnRef idx="2">
+            <a:schemeClr val="accent1">
+              <a:shade val="15000"/>
+            </a:schemeClr>
+          </a:lnRef>
+          <a:fillRef idx="1">
+            <a:schemeClr val="accent1"/>
+          </a:fillRef>
+          <a:effectRef idx="0">
+            <a:schemeClr val="accent1"/>
+          </a:effectRef>
+          <a:fontRef idx="minor">
+            <a:schemeClr val="lt1"/>
+          </a:fontRef>
+        </p:style>
+        <p:txBody>
+          <a:bodyPr rtlCol="0" anchor="ctr"/>
+          <a:lstStyle/>
+          <a:p>
+            <a:pPr algn="ctr"/>
+            <a:r>
+              <a:rPr lang="en-US" dirty="0"/>
+              <a:t>Console -2</a:t>
+            </a:r>
+          </a:p>
+        </p:txBody>
+      </p:sp>
+      <p:sp>
+        <p:nvSpPr>
+          <p:cNvPr id="11" name="Rectangle 10">
+            <a:extLst>
+              <a:ext uri="{FF2B5EF4-FFF2-40B4-BE49-F238E27FC236}">
+                <a16:creationId xmlns:a16="http://schemas.microsoft.com/office/drawing/2014/main" id="{4D705C80-7510-3C2E-555C-D83D84A908C5}"/>
+              </a:ext>
+            </a:extLst>
+          </p:cNvPr>
+          <p:cNvSpPr/>
+          <p:nvPr/>
+        </p:nvSpPr>
+        <p:spPr>
+          <a:xfrm>
+            <a:off x="5975497" y="5511208"/>
+            <a:ext cx="1605517" cy="627320"/>
+          </a:xfrm>
+          <a:prstGeom prst="rect">
+            <a:avLst/>
+          </a:prstGeom>
+        </p:spPr>
+        <p:style>
+          <a:lnRef idx="2">
+            <a:schemeClr val="accent1">
+              <a:shade val="15000"/>
+            </a:schemeClr>
+          </a:lnRef>
+          <a:fillRef idx="1">
+            <a:schemeClr val="accent1"/>
+          </a:fillRef>
+          <a:effectRef idx="0">
+            <a:schemeClr val="accent1"/>
+          </a:effectRef>
+          <a:fontRef idx="minor">
+            <a:schemeClr val="lt1"/>
+          </a:fontRef>
+        </p:style>
+        <p:txBody>
+          <a:bodyPr rtlCol="0" anchor="ctr"/>
+          <a:lstStyle/>
+          <a:p>
+            <a:pPr algn="ctr"/>
+            <a:r>
+              <a:rPr lang="en-US" dirty="0"/>
+              <a:t>Call Stack</a:t>
+            </a:r>
+          </a:p>
+        </p:txBody>
+      </p:sp>
+      <p:sp>
+        <p:nvSpPr>
+          <p:cNvPr id="12" name="Rectangle 11">
+            <a:extLst>
+              <a:ext uri="{FF2B5EF4-FFF2-40B4-BE49-F238E27FC236}">
+                <a16:creationId xmlns:a16="http://schemas.microsoft.com/office/drawing/2014/main" id="{89BC411D-148C-B0DF-E2CC-6B37CD1363F3}"/>
+              </a:ext>
+            </a:extLst>
+          </p:cNvPr>
+          <p:cNvSpPr/>
+          <p:nvPr/>
+        </p:nvSpPr>
+        <p:spPr>
+          <a:xfrm>
+            <a:off x="9019953" y="5511208"/>
+            <a:ext cx="1605517" cy="627320"/>
+          </a:xfrm>
+          <a:prstGeom prst="rect">
+            <a:avLst/>
+          </a:prstGeom>
+        </p:spPr>
+        <p:style>
+          <a:lnRef idx="2">
+            <a:schemeClr val="accent1">
+              <a:shade val="15000"/>
+            </a:schemeClr>
+          </a:lnRef>
+          <a:fillRef idx="1">
+            <a:schemeClr val="accent1"/>
+          </a:fillRef>
+          <a:effectRef idx="0">
+            <a:schemeClr val="accent1"/>
+          </a:effectRef>
+          <a:fontRef idx="minor">
+            <a:schemeClr val="lt1"/>
+          </a:fontRef>
+        </p:style>
+        <p:txBody>
+          <a:bodyPr rtlCol="0" anchor="ctr"/>
+          <a:lstStyle/>
+          <a:p>
+            <a:pPr algn="ctr"/>
+            <a:r>
+              <a:rPr lang="en-US" dirty="0"/>
+              <a:t>Memory Heap</a:t>
+            </a:r>
+          </a:p>
+        </p:txBody>
+      </p:sp>
+      <p:cxnSp>
+        <p:nvCxnSpPr>
+          <p:cNvPr id="14" name="Elbow Connector 13">
+            <a:extLst>
+              <a:ext uri="{FF2B5EF4-FFF2-40B4-BE49-F238E27FC236}">
+                <a16:creationId xmlns:a16="http://schemas.microsoft.com/office/drawing/2014/main" id="{38DC80A3-0DF3-3E5B-12A7-5D1163ED7522}"/>
+              </a:ext>
+            </a:extLst>
+          </p:cNvPr>
+          <p:cNvCxnSpPr>
+            <a:stCxn id="4" idx="2"/>
+            <a:endCxn id="5" idx="1"/>
+          </p:cNvCxnSpPr>
+          <p:nvPr/>
+        </p:nvCxnSpPr>
+        <p:spPr>
+          <a:xfrm rot="16200000" flipH="1">
+            <a:off x="2128284" y="365051"/>
+            <a:ext cx="313660" cy="1582479"/>
+          </a:xfrm>
+          <a:prstGeom prst="bentConnector2">
+            <a:avLst/>
+          </a:prstGeom>
+          <a:ln>
+            <a:tailEnd type="triangle"/>
+          </a:ln>
+        </p:spPr>
+        <p:style>
+          <a:lnRef idx="2">
+            <a:schemeClr val="accent1"/>
+          </a:lnRef>
+          <a:fillRef idx="0">
+            <a:schemeClr val="accent1"/>
+          </a:fillRef>
+          <a:effectRef idx="1">
+            <a:schemeClr val="accent1"/>
+          </a:effectRef>
+          <a:fontRef idx="minor">
+            <a:schemeClr val="tx1"/>
+          </a:fontRef>
+        </p:style>
+      </p:cxnSp>
+      <p:cxnSp>
+        <p:nvCxnSpPr>
+          <p:cNvPr id="16" name="Elbow Connector 15">
+            <a:extLst>
+              <a:ext uri="{FF2B5EF4-FFF2-40B4-BE49-F238E27FC236}">
+                <a16:creationId xmlns:a16="http://schemas.microsoft.com/office/drawing/2014/main" id="{5AB1FFFA-76A7-9D9B-1D1A-F0ABDCEE61DE}"/>
+              </a:ext>
+            </a:extLst>
+          </p:cNvPr>
+          <p:cNvCxnSpPr>
+            <a:stCxn id="4" idx="2"/>
+            <a:endCxn id="6" idx="1"/>
+          </p:cNvCxnSpPr>
+          <p:nvPr/>
+        </p:nvCxnSpPr>
+        <p:spPr>
+          <a:xfrm rot="16200000" flipH="1">
+            <a:off x="1701210" y="792125"/>
+            <a:ext cx="1167808" cy="1582479"/>
+          </a:xfrm>
+          <a:prstGeom prst="bentConnector2">
+            <a:avLst/>
+          </a:prstGeom>
+          <a:ln>
+            <a:tailEnd type="triangle"/>
+          </a:ln>
+        </p:spPr>
+        <p:style>
+          <a:lnRef idx="2">
+            <a:schemeClr val="accent1"/>
+          </a:lnRef>
+          <a:fillRef idx="0">
+            <a:schemeClr val="accent1"/>
+          </a:fillRef>
+          <a:effectRef idx="1">
+            <a:schemeClr val="accent1"/>
+          </a:effectRef>
+          <a:fontRef idx="minor">
+            <a:schemeClr val="tx1"/>
+          </a:fontRef>
+        </p:style>
+      </p:cxnSp>
+      <p:cxnSp>
+        <p:nvCxnSpPr>
+          <p:cNvPr id="18" name="Elbow Connector 17">
+            <a:extLst>
+              <a:ext uri="{FF2B5EF4-FFF2-40B4-BE49-F238E27FC236}">
+                <a16:creationId xmlns:a16="http://schemas.microsoft.com/office/drawing/2014/main" id="{7ABEE62D-AE0F-81C9-EDAF-46A36B00585C}"/>
+              </a:ext>
+            </a:extLst>
+          </p:cNvPr>
+          <p:cNvCxnSpPr>
+            <a:cxnSpLocks/>
+            <a:stCxn id="7" idx="2"/>
+            <a:endCxn id="8" idx="1"/>
+          </p:cNvCxnSpPr>
+          <p:nvPr/>
+        </p:nvCxnSpPr>
+        <p:spPr>
+          <a:xfrm rot="16200000" flipH="1">
+            <a:off x="1982972" y="3005470"/>
+            <a:ext cx="313660" cy="1582479"/>
+          </a:xfrm>
+          <a:prstGeom prst="bentConnector2">
+            <a:avLst/>
+          </a:prstGeom>
+          <a:ln>
+            <a:tailEnd type="triangle"/>
+          </a:ln>
+        </p:spPr>
+        <p:style>
+          <a:lnRef idx="2">
+            <a:schemeClr val="accent1"/>
+          </a:lnRef>
+          <a:fillRef idx="0">
+            <a:schemeClr val="accent1"/>
+          </a:fillRef>
+          <a:effectRef idx="1">
+            <a:schemeClr val="accent1"/>
+          </a:effectRef>
+          <a:fontRef idx="minor">
+            <a:schemeClr val="tx1"/>
+          </a:fontRef>
+        </p:style>
+      </p:cxnSp>
+      <p:cxnSp>
+        <p:nvCxnSpPr>
+          <p:cNvPr id="20" name="Elbow Connector 19">
+            <a:extLst>
+              <a:ext uri="{FF2B5EF4-FFF2-40B4-BE49-F238E27FC236}">
+                <a16:creationId xmlns:a16="http://schemas.microsoft.com/office/drawing/2014/main" id="{B5B57C70-E4CF-3ACD-B5EA-94AE4635B5DD}"/>
+              </a:ext>
+            </a:extLst>
+          </p:cNvPr>
+          <p:cNvCxnSpPr>
+            <a:stCxn id="7" idx="2"/>
+            <a:endCxn id="9" idx="1"/>
+          </p:cNvCxnSpPr>
+          <p:nvPr/>
+        </p:nvCxnSpPr>
+        <p:spPr>
+          <a:xfrm rot="16200000" flipH="1">
+            <a:off x="1555898" y="3432544"/>
+            <a:ext cx="1167808" cy="1582479"/>
+          </a:xfrm>
+          <a:prstGeom prst="bentConnector2">
+            <a:avLst/>
+          </a:prstGeom>
+          <a:ln>
+            <a:tailEnd type="triangle"/>
+          </a:ln>
+        </p:spPr>
+        <p:style>
+          <a:lnRef idx="2">
+            <a:schemeClr val="accent1"/>
+          </a:lnRef>
+          <a:fillRef idx="0">
+            <a:schemeClr val="accent1"/>
+          </a:fillRef>
+          <a:effectRef idx="1">
+            <a:schemeClr val="accent1"/>
+          </a:effectRef>
+          <a:fontRef idx="minor">
+            <a:schemeClr val="tx1"/>
+          </a:fontRef>
+        </p:style>
+      </p:cxnSp>
+      <p:cxnSp>
+        <p:nvCxnSpPr>
+          <p:cNvPr id="22" name="Elbow Connector 21">
+            <a:extLst>
+              <a:ext uri="{FF2B5EF4-FFF2-40B4-BE49-F238E27FC236}">
+                <a16:creationId xmlns:a16="http://schemas.microsoft.com/office/drawing/2014/main" id="{63E8277F-E200-5649-3761-1D79A0FC0CBC}"/>
+              </a:ext>
+            </a:extLst>
+          </p:cNvPr>
+          <p:cNvCxnSpPr>
+            <a:stCxn id="7" idx="2"/>
+            <a:endCxn id="10" idx="1"/>
+          </p:cNvCxnSpPr>
+          <p:nvPr/>
+        </p:nvCxnSpPr>
+        <p:spPr>
+          <a:xfrm rot="16200000" flipH="1">
+            <a:off x="1047308" y="3941134"/>
+            <a:ext cx="2184988" cy="1582479"/>
+          </a:xfrm>
+          <a:prstGeom prst="bentConnector2">
+            <a:avLst/>
+          </a:prstGeom>
+          <a:ln>
+            <a:tailEnd type="triangle"/>
+          </a:ln>
+        </p:spPr>
+        <p:style>
+          <a:lnRef idx="2">
+            <a:schemeClr val="accent1"/>
+          </a:lnRef>
+          <a:fillRef idx="0">
+            <a:schemeClr val="accent1"/>
+          </a:fillRef>
+          <a:effectRef idx="1">
+            <a:schemeClr val="accent1"/>
+          </a:effectRef>
+          <a:fontRef idx="minor">
+            <a:schemeClr val="tx1"/>
+          </a:fontRef>
+        </p:style>
+      </p:cxnSp>
+      <p:sp>
+        <p:nvSpPr>
+          <p:cNvPr id="28" name="Cloud 27">
+            <a:extLst>
+              <a:ext uri="{FF2B5EF4-FFF2-40B4-BE49-F238E27FC236}">
+                <a16:creationId xmlns:a16="http://schemas.microsoft.com/office/drawing/2014/main" id="{03F2B6F9-8BB3-4457-1781-388AB5FC1F2C}"/>
+              </a:ext>
+            </a:extLst>
+          </p:cNvPr>
+          <p:cNvSpPr/>
+          <p:nvPr/>
+        </p:nvSpPr>
+        <p:spPr>
+          <a:xfrm>
+            <a:off x="8612372" y="999460"/>
+            <a:ext cx="2488019" cy="1481469"/>
+          </a:xfrm>
+          <a:prstGeom prst="cloud">
+            <a:avLst/>
+          </a:prstGeom>
+        </p:spPr>
+        <p:style>
+          <a:lnRef idx="2">
+            <a:schemeClr val="accent1">
+              <a:shade val="15000"/>
+            </a:schemeClr>
+          </a:lnRef>
+          <a:fillRef idx="1">
+            <a:schemeClr val="accent1"/>
+          </a:fillRef>
+          <a:effectRef idx="0">
+            <a:schemeClr val="accent1"/>
+          </a:effectRef>
+          <a:fontRef idx="minor">
+            <a:schemeClr val="lt1"/>
+          </a:fontRef>
+        </p:style>
+        <p:txBody>
+          <a:bodyPr rtlCol="0" anchor="ctr"/>
+          <a:lstStyle/>
+          <a:p>
+            <a:pPr algn="ctr"/>
+            <a:r>
+              <a:rPr lang="en-US" dirty="0"/>
+              <a:t>Default</a:t>
+            </a:r>
+          </a:p>
+        </p:txBody>
+      </p:sp>
+      <p:sp>
+        <p:nvSpPr>
+          <p:cNvPr id="29" name="Cloud 28">
+            <a:extLst>
+              <a:ext uri="{FF2B5EF4-FFF2-40B4-BE49-F238E27FC236}">
+                <a16:creationId xmlns:a16="http://schemas.microsoft.com/office/drawing/2014/main" id="{519822CA-D7C2-48B3-FBCD-F745D89DF719}"/>
+              </a:ext>
+            </a:extLst>
+          </p:cNvPr>
+          <p:cNvSpPr/>
+          <p:nvPr/>
+        </p:nvSpPr>
+        <p:spPr>
+          <a:xfrm>
+            <a:off x="7581014" y="3398874"/>
+            <a:ext cx="4192772" cy="1481469"/>
+          </a:xfrm>
+          <a:prstGeom prst="cloud">
+            <a:avLst/>
+          </a:prstGeom>
+        </p:spPr>
+        <p:style>
+          <a:lnRef idx="2">
+            <a:schemeClr val="accent1">
+              <a:shade val="15000"/>
+            </a:schemeClr>
+          </a:lnRef>
+          <a:fillRef idx="1">
+            <a:schemeClr val="accent1"/>
+          </a:fillRef>
+          <a:effectRef idx="0">
+            <a:schemeClr val="accent1"/>
+          </a:effectRef>
+          <a:fontRef idx="minor">
+            <a:schemeClr val="lt1"/>
+          </a:fontRef>
+        </p:style>
+        <p:txBody>
+          <a:bodyPr rtlCol="0" anchor="ctr"/>
+          <a:lstStyle/>
+          <a:p>
+            <a:pPr algn="ctr"/>
+            <a:r>
+              <a:rPr lang="en-US" dirty="0"/>
+              <a:t>Each operation waits for the last one to complete before executing</a:t>
+            </a:r>
+          </a:p>
+        </p:txBody>
+      </p:sp>
+    </p:spTree>
+    <p:extLst>
+      <p:ext uri="{BB962C8B-B14F-4D97-AF65-F5344CB8AC3E}">
+        <p14:creationId xmlns:p14="http://schemas.microsoft.com/office/powerpoint/2010/main" val="3383551077"/>
+      </p:ext>
+    </p:extLst>
+  </p:cSld>
+  <p:clrMapOvr>
+    <a:masterClrMapping/>
+  </p:clrMapOvr>
+</p:sld>
+</file>
+
+<file path=ppt/slides/slide8.xml><?xml version="1.0" encoding="utf-8"?>
+<p:sld xmlns:a="http://schemas.openxmlformats.org/drawingml/2006/main" xmlns:r="http://schemas.openxmlformats.org/officeDocument/2006/relationships" xmlns:p="http://schemas.openxmlformats.org/presentationml/2006/main">
+  <p:cSld>
+    <p:spTree>
+      <p:nvGrpSpPr>
+        <p:cNvPr id="1" name=""/>
+        <p:cNvGrpSpPr/>
+        <p:nvPr/>
+      </p:nvGrpSpPr>
+      <p:grpSpPr>
+        <a:xfrm>
+          <a:off x="0" y="0"/>
+          <a:ext cx="0" cy="0"/>
+          <a:chOff x="0" y="0"/>
+          <a:chExt cx="0" cy="0"/>
+        </a:xfrm>
+      </p:grpSpPr>
+      <p:sp>
+        <p:nvSpPr>
+          <p:cNvPr id="2" name="Title 1">
+            <a:extLst>
+              <a:ext uri="{FF2B5EF4-FFF2-40B4-BE49-F238E27FC236}">
+                <a16:creationId xmlns:a16="http://schemas.microsoft.com/office/drawing/2014/main" id="{16D062C5-CA97-FFF2-B79E-208296009AD4}"/>
+              </a:ext>
+            </a:extLst>
+          </p:cNvPr>
+          <p:cNvSpPr>
+            <a:spLocks noGrp="1"/>
+          </p:cNvSpPr>
+          <p:nvPr>
+            <p:ph type="title"/>
+          </p:nvPr>
+        </p:nvSpPr>
+        <p:spPr/>
+        <p:txBody>
+          <a:bodyPr/>
+          <a:lstStyle/>
+          <a:p>
+            <a:r>
+              <a:rPr lang="en-US" dirty="0"/>
+              <a:t>Blocking code vs Non Blocking code</a:t>
+            </a:r>
+          </a:p>
+        </p:txBody>
+      </p:sp>
+      <p:sp>
+        <p:nvSpPr>
+          <p:cNvPr id="4" name="TextBox 3">
+            <a:extLst>
+              <a:ext uri="{FF2B5EF4-FFF2-40B4-BE49-F238E27FC236}">
+                <a16:creationId xmlns:a16="http://schemas.microsoft.com/office/drawing/2014/main" id="{155CC9CC-8ABC-EA1B-A3F7-D563C3A6ED61}"/>
+              </a:ext>
+            </a:extLst>
+          </p:cNvPr>
+          <p:cNvSpPr txBox="1"/>
+          <p:nvPr/>
+        </p:nvSpPr>
+        <p:spPr>
+          <a:xfrm>
+            <a:off x="946298" y="1690688"/>
+            <a:ext cx="3626249" cy="3693319"/>
+          </a:xfrm>
+          <a:prstGeom prst="rect">
+            <a:avLst/>
+          </a:prstGeom>
+          <a:noFill/>
+        </p:spPr>
+        <p:txBody>
+          <a:bodyPr wrap="none" rtlCol="0">
+            <a:spAutoFit/>
+          </a:bodyPr>
+          <a:lstStyle/>
+          <a:p>
+            <a:r>
+              <a:rPr lang="en-US" dirty="0"/>
+              <a:t>Blocking:</a:t>
+            </a:r>
+          </a:p>
+          <a:p>
+            <a:r>
+              <a:rPr lang="en-US" dirty="0"/>
+              <a:t>	Block the flow of Program</a:t>
+            </a:r>
+          </a:p>
+          <a:p>
+            <a:r>
+              <a:rPr lang="en-US" dirty="0"/>
+              <a:t>	Read File Sync</a:t>
+            </a:r>
+          </a:p>
+          <a:p>
+            <a:r>
+              <a:rPr lang="en-US" dirty="0"/>
+              <a:t>Simple scripts</a:t>
+            </a:r>
+          </a:p>
+          <a:p>
+            <a:r>
+              <a:rPr lang="en-US" dirty="0"/>
+              <a:t>Small tasks</a:t>
+            </a:r>
+          </a:p>
+          <a:p>
+            <a:endParaRPr lang="en-US" dirty="0"/>
+          </a:p>
+          <a:p>
+            <a:r>
+              <a:rPr lang="en-US" dirty="0"/>
+              <a:t>Non Blocking:</a:t>
+            </a:r>
+          </a:p>
+          <a:p>
+            <a:r>
+              <a:rPr lang="en-US" dirty="0"/>
+              <a:t>	Does not block execution</a:t>
+            </a:r>
+          </a:p>
+          <a:p>
+            <a:r>
+              <a:rPr lang="en-US" dirty="0"/>
+              <a:t>	Read File Async</a:t>
+            </a:r>
+          </a:p>
+          <a:p>
+            <a:r>
+              <a:rPr lang="en-US" dirty="0"/>
+              <a:t>API calls</a:t>
+            </a:r>
+          </a:p>
+          <a:p>
+            <a:r>
+              <a:rPr lang="en-US" dirty="0"/>
+              <a:t>File read</a:t>
+            </a:r>
+          </a:p>
+          <a:p>
+            <a:r>
+              <a:rPr lang="en-US" dirty="0"/>
+              <a:t>Database</a:t>
+            </a:r>
+          </a:p>
+          <a:p>
+            <a:r>
+              <a:rPr lang="en-US" dirty="0"/>
+              <a:t>Server </a:t>
+            </a:r>
+          </a:p>
+        </p:txBody>
+      </p:sp>
+    </p:spTree>
+    <p:extLst>
+      <p:ext uri="{BB962C8B-B14F-4D97-AF65-F5344CB8AC3E}">
+        <p14:creationId xmlns:p14="http://schemas.microsoft.com/office/powerpoint/2010/main" val="2776309216"/>
+      </p:ext>
+    </p:extLst>
+  </p:cSld>
+  <p:clrMapOvr>
+    <a:masterClrMapping/>
+  </p:clrMapOvr>
+</p:sld>
+</file>
+
+<file path=ppt/slides/slide9.xml><?xml version="1.0" encoding="utf-8"?>
+<p:sld xmlns:a="http://schemas.openxmlformats.org/drawingml/2006/main" xmlns:r="http://schemas.openxmlformats.org/officeDocument/2006/relationships" xmlns:p="http://schemas.openxmlformats.org/presentationml/2006/main">
+  <p:cSld>
+    <p:spTree>
+      <p:nvGrpSpPr>
+        <p:cNvPr id="1" name=""/>
+        <p:cNvGrpSpPr/>
+        <p:nvPr/>
+      </p:nvGrpSpPr>
+      <p:grpSpPr>
+        <a:xfrm>
+          <a:off x="0" y="0"/>
+          <a:ext cx="0" cy="0"/>
+          <a:chOff x="0" y="0"/>
+          <a:chExt cx="0" cy="0"/>
+        </a:xfrm>
+      </p:grpSpPr>
+      <p:sp>
+        <p:nvSpPr>
+          <p:cNvPr id="21" name="Rectangle 20">
+            <a:extLst>
+              <a:ext uri="{FF2B5EF4-FFF2-40B4-BE49-F238E27FC236}">
+                <a16:creationId xmlns:a16="http://schemas.microsoft.com/office/drawing/2014/main" id="{DF2B9A03-D5BF-A7DC-0623-3BC30EC355B0}"/>
+              </a:ext>
+            </a:extLst>
+          </p:cNvPr>
+          <p:cNvSpPr/>
+          <p:nvPr/>
+        </p:nvSpPr>
+        <p:spPr>
+          <a:xfrm>
+            <a:off x="818707" y="808074"/>
+            <a:ext cx="4306186" cy="2743200"/>
+          </a:xfrm>
+          <a:prstGeom prst="rect">
+            <a:avLst/>
+          </a:prstGeom>
+        </p:spPr>
+        <p:style>
+          <a:lnRef idx="2">
+            <a:schemeClr val="accent1">
+              <a:shade val="15000"/>
+            </a:schemeClr>
+          </a:lnRef>
+          <a:fillRef idx="1">
+            <a:schemeClr val="accent1"/>
+          </a:fillRef>
+          <a:effectRef idx="0">
+            <a:schemeClr val="accent1"/>
+          </a:effectRef>
+          <a:fontRef idx="minor">
+            <a:schemeClr val="lt1"/>
+          </a:fontRef>
+        </p:style>
+        <p:txBody>
+          <a:bodyPr rtlCol="0" anchor="t"/>
+          <a:lstStyle/>
+          <a:p>
+            <a:pPr algn="ctr"/>
+            <a:r>
+              <a:rPr lang="en-US" dirty="0"/>
+              <a:t>JS Engine</a:t>
+            </a:r>
+          </a:p>
+        </p:txBody>
+      </p:sp>
+      <p:sp>
+        <p:nvSpPr>
+          <p:cNvPr id="22" name="Rectangle 21">
+            <a:extLst>
+              <a:ext uri="{FF2B5EF4-FFF2-40B4-BE49-F238E27FC236}">
+                <a16:creationId xmlns:a16="http://schemas.microsoft.com/office/drawing/2014/main" id="{719218A9-DE3F-90E2-CBF9-E0F5A48150F3}"/>
+              </a:ext>
+            </a:extLst>
+          </p:cNvPr>
+          <p:cNvSpPr/>
+          <p:nvPr/>
+        </p:nvSpPr>
+        <p:spPr>
+          <a:xfrm>
+            <a:off x="7223051" y="808074"/>
+            <a:ext cx="4306186" cy="2743200"/>
+          </a:xfrm>
+          <a:prstGeom prst="rect">
+            <a:avLst/>
+          </a:prstGeom>
+        </p:spPr>
+        <p:style>
+          <a:lnRef idx="2">
+            <a:schemeClr val="accent1">
+              <a:shade val="15000"/>
+            </a:schemeClr>
+          </a:lnRef>
+          <a:fillRef idx="1">
+            <a:schemeClr val="accent1"/>
+          </a:fillRef>
+          <a:effectRef idx="0">
+            <a:schemeClr val="accent1"/>
+          </a:effectRef>
+          <a:fontRef idx="minor">
+            <a:schemeClr val="lt1"/>
+          </a:fontRef>
+        </p:style>
+        <p:txBody>
+          <a:bodyPr rtlCol="0" anchor="t"/>
+          <a:lstStyle/>
+          <a:p>
+            <a:pPr algn="ctr"/>
+            <a:r>
+              <a:rPr lang="en-US" dirty="0" err="1"/>
+              <a:t>webAPI</a:t>
+            </a:r>
+            <a:endParaRPr lang="en-US" dirty="0"/>
+          </a:p>
+        </p:txBody>
+      </p:sp>
+      <p:sp>
+        <p:nvSpPr>
+          <p:cNvPr id="23" name="Rectangle 22">
+            <a:extLst>
+              <a:ext uri="{FF2B5EF4-FFF2-40B4-BE49-F238E27FC236}">
+                <a16:creationId xmlns:a16="http://schemas.microsoft.com/office/drawing/2014/main" id="{E40489DF-E2B1-8A93-4C83-9338DE0B3F1B}"/>
+              </a:ext>
+            </a:extLst>
+          </p:cNvPr>
+          <p:cNvSpPr/>
+          <p:nvPr/>
+        </p:nvSpPr>
+        <p:spPr>
+          <a:xfrm>
+            <a:off x="4020879" y="5092995"/>
+            <a:ext cx="4306186" cy="1201479"/>
+          </a:xfrm>
+          <a:prstGeom prst="rect">
+            <a:avLst/>
+          </a:prstGeom>
+        </p:spPr>
+        <p:style>
+          <a:lnRef idx="2">
+            <a:schemeClr val="accent1">
+              <a:shade val="15000"/>
+            </a:schemeClr>
+          </a:lnRef>
+          <a:fillRef idx="1">
+            <a:schemeClr val="accent1"/>
+          </a:fillRef>
+          <a:effectRef idx="0">
+            <a:schemeClr val="accent1"/>
+          </a:effectRef>
+          <a:fontRef idx="minor">
+            <a:schemeClr val="lt1"/>
+          </a:fontRef>
+        </p:style>
+        <p:txBody>
+          <a:bodyPr rtlCol="0" anchor="t"/>
+          <a:lstStyle/>
+          <a:p>
+            <a:pPr algn="ctr"/>
+            <a:r>
+              <a:rPr lang="en-US" dirty="0"/>
+              <a:t>Task Queue</a:t>
+            </a:r>
+          </a:p>
+        </p:txBody>
+      </p:sp>
+      <p:sp>
+        <p:nvSpPr>
+          <p:cNvPr id="24" name="Rectangle 23">
+            <a:extLst>
+              <a:ext uri="{FF2B5EF4-FFF2-40B4-BE49-F238E27FC236}">
+                <a16:creationId xmlns:a16="http://schemas.microsoft.com/office/drawing/2014/main" id="{1F365170-DAA5-86DC-52D3-FF5001691174}"/>
+              </a:ext>
+            </a:extLst>
+          </p:cNvPr>
+          <p:cNvSpPr/>
+          <p:nvPr/>
+        </p:nvSpPr>
+        <p:spPr>
+          <a:xfrm>
+            <a:off x="1132367" y="1183758"/>
+            <a:ext cx="887819" cy="2027275"/>
+          </a:xfrm>
+          <a:prstGeom prst="rect">
+            <a:avLst/>
+          </a:prstGeom>
+          <a:solidFill>
+            <a:schemeClr val="accent2"/>
+          </a:solidFill>
+        </p:spPr>
+        <p:style>
+          <a:lnRef idx="2">
+            <a:schemeClr val="accent1">
+              <a:shade val="15000"/>
+            </a:schemeClr>
+          </a:lnRef>
+          <a:fillRef idx="1">
+            <a:schemeClr val="accent1"/>
+          </a:fillRef>
+          <a:effectRef idx="0">
+            <a:schemeClr val="accent1"/>
+          </a:effectRef>
+          <a:fontRef idx="minor">
+            <a:schemeClr val="lt1"/>
+          </a:fontRef>
+        </p:style>
+        <p:txBody>
+          <a:bodyPr rtlCol="0" anchor="ctr"/>
+          <a:lstStyle/>
+          <a:p>
+            <a:pPr algn="ctr"/>
+            <a:r>
+              <a:rPr lang="en-US" sz="1200" dirty="0"/>
+              <a:t>Memory Heap</a:t>
+            </a:r>
+          </a:p>
+        </p:txBody>
+      </p:sp>
+      <p:sp>
+        <p:nvSpPr>
+          <p:cNvPr id="25" name="Rectangle 24">
+            <a:extLst>
+              <a:ext uri="{FF2B5EF4-FFF2-40B4-BE49-F238E27FC236}">
+                <a16:creationId xmlns:a16="http://schemas.microsoft.com/office/drawing/2014/main" id="{5CDD6642-DE9D-AF4D-9D3D-5567FCCE0F55}"/>
+              </a:ext>
+            </a:extLst>
+          </p:cNvPr>
+          <p:cNvSpPr/>
+          <p:nvPr/>
+        </p:nvSpPr>
+        <p:spPr>
+          <a:xfrm>
+            <a:off x="3128630" y="1261730"/>
+            <a:ext cx="1613491" cy="2027275"/>
+          </a:xfrm>
+          <a:prstGeom prst="rect">
+            <a:avLst/>
+          </a:prstGeom>
+          <a:solidFill>
+            <a:schemeClr val="accent2"/>
+          </a:solidFill>
+        </p:spPr>
+        <p:style>
+          <a:lnRef idx="2">
+            <a:schemeClr val="accent1">
+              <a:shade val="15000"/>
+            </a:schemeClr>
+          </a:lnRef>
+          <a:fillRef idx="1">
+            <a:schemeClr val="accent1"/>
+          </a:fillRef>
+          <a:effectRef idx="0">
+            <a:schemeClr val="accent1"/>
+          </a:effectRef>
+          <a:fontRef idx="minor">
+            <a:schemeClr val="lt1"/>
+          </a:fontRef>
+        </p:style>
+        <p:txBody>
+          <a:bodyPr rtlCol="0" anchor="t"/>
+          <a:lstStyle/>
+          <a:p>
+            <a:pPr algn="ctr"/>
+            <a:r>
+              <a:rPr lang="en-US" dirty="0"/>
+              <a:t>Call Stack</a:t>
+            </a:r>
+          </a:p>
+        </p:txBody>
+      </p:sp>
+      <p:sp>
+        <p:nvSpPr>
+          <p:cNvPr id="26" name="Rectangle 25">
+            <a:extLst>
+              <a:ext uri="{FF2B5EF4-FFF2-40B4-BE49-F238E27FC236}">
+                <a16:creationId xmlns:a16="http://schemas.microsoft.com/office/drawing/2014/main" id="{25D0F46B-176D-6417-AB4C-839D84322CE5}"/>
+              </a:ext>
+            </a:extLst>
+          </p:cNvPr>
+          <p:cNvSpPr/>
+          <p:nvPr/>
+        </p:nvSpPr>
+        <p:spPr>
+          <a:xfrm>
+            <a:off x="7520319" y="1261730"/>
+            <a:ext cx="1613491" cy="2027275"/>
+          </a:xfrm>
+          <a:prstGeom prst="rect">
+            <a:avLst/>
+          </a:prstGeom>
+          <a:solidFill>
+            <a:schemeClr val="accent2"/>
+          </a:solidFill>
+        </p:spPr>
+        <p:style>
+          <a:lnRef idx="2">
+            <a:schemeClr val="accent1">
+              <a:shade val="15000"/>
+            </a:schemeClr>
+          </a:lnRef>
+          <a:fillRef idx="1">
+            <a:schemeClr val="accent1"/>
+          </a:fillRef>
+          <a:effectRef idx="0">
+            <a:schemeClr val="accent1"/>
+          </a:effectRef>
+          <a:fontRef idx="minor">
+            <a:schemeClr val="lt1"/>
+          </a:fontRef>
+        </p:style>
+        <p:txBody>
+          <a:bodyPr rtlCol="0" anchor="ctr"/>
+          <a:lstStyle/>
+          <a:p>
+            <a:pPr algn="ctr"/>
+            <a:r>
+              <a:rPr lang="en-US" dirty="0"/>
+              <a:t>DOM API</a:t>
+            </a:r>
+          </a:p>
+          <a:p>
+            <a:pPr algn="ctr"/>
+            <a:r>
+              <a:rPr lang="en-US" dirty="0"/>
+              <a:t>Set Timeout</a:t>
+            </a:r>
+          </a:p>
+          <a:p>
+            <a:pPr algn="ctr"/>
+            <a:r>
+              <a:rPr lang="en-US" dirty="0"/>
+              <a:t>Set interval</a:t>
+            </a:r>
+          </a:p>
+          <a:p>
+            <a:pPr algn="ctr"/>
+            <a:r>
+              <a:rPr lang="en-US" dirty="0"/>
+              <a:t>Fetch()</a:t>
+            </a:r>
+          </a:p>
+        </p:txBody>
+      </p:sp>
+      <p:sp>
+        <p:nvSpPr>
+          <p:cNvPr id="27" name="Rectangle 26">
+            <a:extLst>
+              <a:ext uri="{FF2B5EF4-FFF2-40B4-BE49-F238E27FC236}">
+                <a16:creationId xmlns:a16="http://schemas.microsoft.com/office/drawing/2014/main" id="{671026B4-B0A6-E5C7-7D51-7AA45F07C0DB}"/>
+              </a:ext>
+            </a:extLst>
+          </p:cNvPr>
+          <p:cNvSpPr/>
+          <p:nvPr/>
+        </p:nvSpPr>
+        <p:spPr>
+          <a:xfrm>
+            <a:off x="9706639" y="2512827"/>
+            <a:ext cx="1613491" cy="776178"/>
+          </a:xfrm>
+          <a:prstGeom prst="rect">
+            <a:avLst/>
+          </a:prstGeom>
+          <a:solidFill>
+            <a:schemeClr val="accent2"/>
+          </a:solidFill>
+        </p:spPr>
+        <p:style>
+          <a:lnRef idx="2">
+            <a:schemeClr val="accent1">
+              <a:shade val="15000"/>
+            </a:schemeClr>
+          </a:lnRef>
+          <a:fillRef idx="1">
+            <a:schemeClr val="accent1"/>
+          </a:fillRef>
+          <a:effectRef idx="0">
+            <a:schemeClr val="accent1"/>
+          </a:effectRef>
+          <a:fontRef idx="minor">
+            <a:schemeClr val="lt1"/>
+          </a:fontRef>
+        </p:style>
+        <p:txBody>
+          <a:bodyPr rtlCol="0" anchor="ctr"/>
+          <a:lstStyle/>
+          <a:p>
+            <a:pPr algn="ctr"/>
+            <a:r>
+              <a:rPr lang="en-US" dirty="0"/>
+              <a:t>Register </a:t>
+            </a:r>
+          </a:p>
+          <a:p>
+            <a:pPr algn="ctr"/>
+            <a:r>
+              <a:rPr lang="en-US" dirty="0"/>
+              <a:t>Call back</a:t>
+            </a:r>
+          </a:p>
+        </p:txBody>
+      </p:sp>
+      <p:sp>
+        <p:nvSpPr>
+          <p:cNvPr id="28" name="Rectangle 27">
+            <a:extLst>
+              <a:ext uri="{FF2B5EF4-FFF2-40B4-BE49-F238E27FC236}">
+                <a16:creationId xmlns:a16="http://schemas.microsoft.com/office/drawing/2014/main" id="{B889B2AC-AAA8-C621-42D4-E855218E1321}"/>
+              </a:ext>
+            </a:extLst>
+          </p:cNvPr>
+          <p:cNvSpPr/>
+          <p:nvPr/>
+        </p:nvSpPr>
+        <p:spPr>
+          <a:xfrm>
+            <a:off x="4159988" y="5596270"/>
+            <a:ext cx="1613491" cy="453656"/>
+          </a:xfrm>
+          <a:prstGeom prst="rect">
+            <a:avLst/>
+          </a:prstGeom>
+          <a:solidFill>
+            <a:schemeClr val="accent2"/>
+          </a:solidFill>
+        </p:spPr>
+        <p:style>
+          <a:lnRef idx="2">
+            <a:schemeClr val="accent1">
+              <a:shade val="15000"/>
+            </a:schemeClr>
+          </a:lnRef>
+          <a:fillRef idx="1">
+            <a:schemeClr val="accent1"/>
+          </a:fillRef>
+          <a:effectRef idx="0">
+            <a:schemeClr val="accent1"/>
+          </a:effectRef>
+          <a:fontRef idx="minor">
+            <a:schemeClr val="lt1"/>
+          </a:fontRef>
+        </p:style>
+        <p:txBody>
+          <a:bodyPr rtlCol="0" anchor="ctr"/>
+          <a:lstStyle/>
+          <a:p>
+            <a:pPr algn="ctr"/>
+            <a:r>
+              <a:rPr lang="en-US" dirty="0"/>
+              <a:t>CB</a:t>
+            </a:r>
+          </a:p>
+        </p:txBody>
+      </p:sp>
+      <p:sp>
+        <p:nvSpPr>
+          <p:cNvPr id="29" name="Rectangle 28">
+            <a:extLst>
+              <a:ext uri="{FF2B5EF4-FFF2-40B4-BE49-F238E27FC236}">
+                <a16:creationId xmlns:a16="http://schemas.microsoft.com/office/drawing/2014/main" id="{83F9DCD1-B3E7-DA55-7E32-C4204A709056}"/>
+              </a:ext>
+            </a:extLst>
+          </p:cNvPr>
+          <p:cNvSpPr/>
+          <p:nvPr/>
+        </p:nvSpPr>
+        <p:spPr>
+          <a:xfrm>
+            <a:off x="5963092" y="5596270"/>
+            <a:ext cx="1613491" cy="453656"/>
+          </a:xfrm>
+          <a:prstGeom prst="rect">
+            <a:avLst/>
+          </a:prstGeom>
+          <a:solidFill>
+            <a:schemeClr val="accent2"/>
+          </a:solidFill>
+        </p:spPr>
+        <p:style>
+          <a:lnRef idx="2">
+            <a:schemeClr val="accent1">
+              <a:shade val="15000"/>
+            </a:schemeClr>
+          </a:lnRef>
+          <a:fillRef idx="1">
+            <a:schemeClr val="accent1"/>
+          </a:fillRef>
+          <a:effectRef idx="0">
+            <a:schemeClr val="accent1"/>
+          </a:effectRef>
+          <a:fontRef idx="minor">
+            <a:schemeClr val="lt1"/>
+          </a:fontRef>
+        </p:style>
+        <p:txBody>
+          <a:bodyPr rtlCol="0" anchor="ctr"/>
+          <a:lstStyle/>
+          <a:p>
+            <a:pPr algn="ctr"/>
+            <a:r>
+              <a:rPr lang="en-US" dirty="0"/>
+              <a:t>CB</a:t>
+            </a:r>
+          </a:p>
+        </p:txBody>
+      </p:sp>
+      <p:sp>
+        <p:nvSpPr>
+          <p:cNvPr id="30" name="Rectangle 29">
+            <a:extLst>
+              <a:ext uri="{FF2B5EF4-FFF2-40B4-BE49-F238E27FC236}">
+                <a16:creationId xmlns:a16="http://schemas.microsoft.com/office/drawing/2014/main" id="{851BD1E6-0976-9987-31E9-A1DF84971273}"/>
+              </a:ext>
+            </a:extLst>
+          </p:cNvPr>
+          <p:cNvSpPr/>
+          <p:nvPr/>
+        </p:nvSpPr>
+        <p:spPr>
+          <a:xfrm>
+            <a:off x="3237614" y="2048539"/>
+            <a:ext cx="1385777" cy="311890"/>
+          </a:xfrm>
+          <a:prstGeom prst="rect">
+            <a:avLst/>
+          </a:prstGeom>
+          <a:solidFill>
+            <a:schemeClr val="accent5">
+              <a:lumMod val="75000"/>
+            </a:schemeClr>
+          </a:solidFill>
+        </p:spPr>
+        <p:style>
+          <a:lnRef idx="2">
+            <a:schemeClr val="accent1">
+              <a:shade val="15000"/>
+            </a:schemeClr>
+          </a:lnRef>
+          <a:fillRef idx="1">
+            <a:schemeClr val="accent1"/>
+          </a:fillRef>
+          <a:effectRef idx="0">
+            <a:schemeClr val="accent1"/>
+          </a:effectRef>
+          <a:fontRef idx="minor">
+            <a:schemeClr val="lt1"/>
+          </a:fontRef>
+        </p:style>
+        <p:txBody>
+          <a:bodyPr rtlCol="0" anchor="ctr"/>
+          <a:lstStyle/>
+          <a:p>
+            <a:pPr algn="ctr"/>
+            <a:r>
+              <a:rPr lang="en-US" dirty="0" err="1"/>
+              <a:t>fn</a:t>
+            </a:r>
+            <a:endParaRPr lang="en-US" dirty="0"/>
+          </a:p>
+        </p:txBody>
+      </p:sp>
+      <p:sp>
+        <p:nvSpPr>
+          <p:cNvPr id="32" name="Rectangle 31">
+            <a:extLst>
+              <a:ext uri="{FF2B5EF4-FFF2-40B4-BE49-F238E27FC236}">
+                <a16:creationId xmlns:a16="http://schemas.microsoft.com/office/drawing/2014/main" id="{19A75D32-B969-7DD4-D182-5BE00405B1F2}"/>
+              </a:ext>
+            </a:extLst>
+          </p:cNvPr>
+          <p:cNvSpPr/>
+          <p:nvPr/>
+        </p:nvSpPr>
+        <p:spPr>
+          <a:xfrm>
+            <a:off x="3240272" y="2512827"/>
+            <a:ext cx="1385777" cy="311890"/>
+          </a:xfrm>
+          <a:prstGeom prst="rect">
+            <a:avLst/>
+          </a:prstGeom>
+          <a:solidFill>
+            <a:schemeClr val="accent5">
+              <a:lumMod val="75000"/>
+            </a:schemeClr>
+          </a:solidFill>
+        </p:spPr>
+        <p:style>
+          <a:lnRef idx="2">
+            <a:schemeClr val="accent1">
+              <a:shade val="15000"/>
+            </a:schemeClr>
+          </a:lnRef>
+          <a:fillRef idx="1">
+            <a:schemeClr val="accent1"/>
+          </a:fillRef>
+          <a:effectRef idx="0">
+            <a:schemeClr val="accent1"/>
+          </a:effectRef>
+          <a:fontRef idx="minor">
+            <a:schemeClr val="lt1"/>
+          </a:fontRef>
+        </p:style>
+        <p:txBody>
+          <a:bodyPr rtlCol="0" anchor="ctr"/>
+          <a:lstStyle/>
+          <a:p>
+            <a:pPr algn="ctr"/>
+            <a:r>
+              <a:rPr lang="en-US" dirty="0" err="1"/>
+              <a:t>fn</a:t>
+            </a:r>
+            <a:endParaRPr lang="en-US" dirty="0"/>
+          </a:p>
+        </p:txBody>
+      </p:sp>
+      <p:sp>
+        <p:nvSpPr>
+          <p:cNvPr id="33" name="Rectangle 32">
+            <a:extLst>
+              <a:ext uri="{FF2B5EF4-FFF2-40B4-BE49-F238E27FC236}">
+                <a16:creationId xmlns:a16="http://schemas.microsoft.com/office/drawing/2014/main" id="{501BC72F-241A-CACA-7AC5-7BEB16983970}"/>
+              </a:ext>
+            </a:extLst>
+          </p:cNvPr>
+          <p:cNvSpPr/>
+          <p:nvPr/>
+        </p:nvSpPr>
+        <p:spPr>
+          <a:xfrm>
+            <a:off x="3238056" y="2931051"/>
+            <a:ext cx="1385777" cy="311890"/>
+          </a:xfrm>
+          <a:prstGeom prst="rect">
+            <a:avLst/>
+          </a:prstGeom>
+          <a:solidFill>
+            <a:schemeClr val="accent5">
+              <a:lumMod val="75000"/>
+            </a:schemeClr>
+          </a:solidFill>
+        </p:spPr>
+        <p:style>
+          <a:lnRef idx="2">
+            <a:schemeClr val="accent1">
+              <a:shade val="15000"/>
+            </a:schemeClr>
+          </a:lnRef>
+          <a:fillRef idx="1">
+            <a:schemeClr val="accent1"/>
+          </a:fillRef>
+          <a:effectRef idx="0">
+            <a:schemeClr val="accent1"/>
+          </a:effectRef>
+          <a:fontRef idx="minor">
+            <a:schemeClr val="lt1"/>
+          </a:fontRef>
+        </p:style>
+        <p:txBody>
+          <a:bodyPr rtlCol="0" anchor="ctr"/>
+          <a:lstStyle/>
+          <a:p>
+            <a:pPr algn="ctr"/>
+            <a:r>
+              <a:rPr lang="en-US" dirty="0"/>
+              <a:t>global</a:t>
+            </a:r>
+          </a:p>
+        </p:txBody>
+      </p:sp>
+      <p:cxnSp>
+        <p:nvCxnSpPr>
+          <p:cNvPr id="35" name="Straight Arrow Connector 34">
+            <a:extLst>
+              <a:ext uri="{FF2B5EF4-FFF2-40B4-BE49-F238E27FC236}">
+                <a16:creationId xmlns:a16="http://schemas.microsoft.com/office/drawing/2014/main" id="{1A646918-E086-0984-7480-3078243D612D}"/>
+              </a:ext>
+            </a:extLst>
+          </p:cNvPr>
+          <p:cNvCxnSpPr>
+            <a:endCxn id="26" idx="1"/>
+          </p:cNvCxnSpPr>
+          <p:nvPr/>
+        </p:nvCxnSpPr>
+        <p:spPr>
+          <a:xfrm>
+            <a:off x="4623391" y="2243470"/>
+            <a:ext cx="2896928" cy="31898"/>
+          </a:xfrm>
+          <a:prstGeom prst="straightConnector1">
+            <a:avLst/>
+          </a:prstGeom>
+          <a:ln>
+            <a:tailEnd type="triangle"/>
+          </a:ln>
+        </p:spPr>
+        <p:style>
+          <a:lnRef idx="2">
+            <a:schemeClr val="dk1"/>
+          </a:lnRef>
+          <a:fillRef idx="0">
+            <a:schemeClr val="dk1"/>
+          </a:fillRef>
+          <a:effectRef idx="1">
+            <a:schemeClr val="dk1"/>
+          </a:effectRef>
+          <a:fontRef idx="minor">
+            <a:schemeClr val="tx1"/>
+          </a:fontRef>
+        </p:style>
+      </p:cxnSp>
+      <p:cxnSp>
+        <p:nvCxnSpPr>
+          <p:cNvPr id="37" name="Elbow Connector 36">
+            <a:extLst>
+              <a:ext uri="{FF2B5EF4-FFF2-40B4-BE49-F238E27FC236}">
+                <a16:creationId xmlns:a16="http://schemas.microsoft.com/office/drawing/2014/main" id="{A8B853AD-C24A-1A52-523D-D5EEAC6B7C2C}"/>
+              </a:ext>
+            </a:extLst>
+          </p:cNvPr>
+          <p:cNvCxnSpPr>
+            <a:endCxn id="27" idx="0"/>
+          </p:cNvCxnSpPr>
+          <p:nvPr/>
+        </p:nvCxnSpPr>
+        <p:spPr>
+          <a:xfrm>
+            <a:off x="9133810" y="2275368"/>
+            <a:ext cx="1379575" cy="237459"/>
+          </a:xfrm>
+          <a:prstGeom prst="bentConnector2">
+            <a:avLst/>
+          </a:prstGeom>
+          <a:ln>
+            <a:tailEnd type="triangle"/>
+          </a:ln>
+        </p:spPr>
+        <p:style>
+          <a:lnRef idx="2">
+            <a:schemeClr val="dk1"/>
+          </a:lnRef>
+          <a:fillRef idx="0">
+            <a:schemeClr val="dk1"/>
+          </a:fillRef>
+          <a:effectRef idx="1">
+            <a:schemeClr val="dk1"/>
+          </a:effectRef>
+          <a:fontRef idx="minor">
+            <a:schemeClr val="tx1"/>
+          </a:fontRef>
+        </p:style>
+      </p:cxnSp>
+      <p:cxnSp>
+        <p:nvCxnSpPr>
+          <p:cNvPr id="39" name="Elbow Connector 38">
+            <a:extLst>
+              <a:ext uri="{FF2B5EF4-FFF2-40B4-BE49-F238E27FC236}">
+                <a16:creationId xmlns:a16="http://schemas.microsoft.com/office/drawing/2014/main" id="{C2F959D8-1BE2-F183-C92D-03E94F95D6CF}"/>
+              </a:ext>
+            </a:extLst>
+          </p:cNvPr>
+          <p:cNvCxnSpPr/>
+          <p:nvPr/>
+        </p:nvCxnSpPr>
+        <p:spPr>
+          <a:xfrm rot="10800000" flipV="1">
+            <a:off x="7616458" y="3289004"/>
+            <a:ext cx="2931041" cy="2580167"/>
+          </a:xfrm>
+          <a:prstGeom prst="bentConnector3">
+            <a:avLst/>
+          </a:prstGeom>
+          <a:ln>
+            <a:tailEnd type="triangle"/>
+          </a:ln>
+        </p:spPr>
+        <p:style>
+          <a:lnRef idx="2">
+            <a:schemeClr val="dk1"/>
+          </a:lnRef>
+          <a:fillRef idx="0">
+            <a:schemeClr val="dk1"/>
+          </a:fillRef>
+          <a:effectRef idx="1">
+            <a:schemeClr val="dk1"/>
+          </a:effectRef>
+          <a:fontRef idx="minor">
+            <a:schemeClr val="tx1"/>
+          </a:fontRef>
+        </p:style>
+      </p:cxnSp>
+      <p:cxnSp>
+        <p:nvCxnSpPr>
+          <p:cNvPr id="41" name="Elbow Connector 40">
+            <a:extLst>
+              <a:ext uri="{FF2B5EF4-FFF2-40B4-BE49-F238E27FC236}">
+                <a16:creationId xmlns:a16="http://schemas.microsoft.com/office/drawing/2014/main" id="{FBC3E32A-1D4F-829E-851A-C7FC380411D0}"/>
+              </a:ext>
+            </a:extLst>
+          </p:cNvPr>
+          <p:cNvCxnSpPr>
+            <a:stCxn id="23" idx="1"/>
+            <a:endCxn id="25" idx="2"/>
+          </p:cNvCxnSpPr>
+          <p:nvPr/>
+        </p:nvCxnSpPr>
+        <p:spPr>
+          <a:xfrm rot="10800000">
+            <a:off x="3935377" y="3289005"/>
+            <a:ext cx="85503" cy="2404730"/>
+          </a:xfrm>
+          <a:prstGeom prst="bentConnector2">
+            <a:avLst/>
+          </a:prstGeom>
+          <a:ln>
+            <a:tailEnd type="triangle"/>
+          </a:ln>
+        </p:spPr>
+        <p:style>
+          <a:lnRef idx="2">
+            <a:schemeClr val="dk1"/>
+          </a:lnRef>
+          <a:fillRef idx="0">
+            <a:schemeClr val="dk1"/>
+          </a:fillRef>
+          <a:effectRef idx="1">
+            <a:schemeClr val="dk1"/>
+          </a:effectRef>
+          <a:fontRef idx="minor">
+            <a:schemeClr val="tx1"/>
+          </a:fontRef>
+        </p:style>
+      </p:cxnSp>
+      <p:sp>
+        <p:nvSpPr>
+          <p:cNvPr id="42" name="TextBox 41">
+            <a:extLst>
+              <a:ext uri="{FF2B5EF4-FFF2-40B4-BE49-F238E27FC236}">
+                <a16:creationId xmlns:a16="http://schemas.microsoft.com/office/drawing/2014/main" id="{25F97C81-FA63-73BA-9D1D-0EB8847A217F}"/>
+              </a:ext>
+            </a:extLst>
+          </p:cNvPr>
+          <p:cNvSpPr txBox="1"/>
+          <p:nvPr/>
+        </p:nvSpPr>
+        <p:spPr>
+          <a:xfrm>
+            <a:off x="2071385" y="4437838"/>
+            <a:ext cx="1885003" cy="369332"/>
+          </a:xfrm>
+          <a:prstGeom prst="rect">
+            <a:avLst/>
+          </a:prstGeom>
+          <a:noFill/>
+        </p:spPr>
+        <p:txBody>
+          <a:bodyPr wrap="none" rtlCol="0">
+            <a:spAutoFit/>
+          </a:bodyPr>
+          <a:lstStyle/>
+          <a:p>
+            <a:r>
+              <a:rPr lang="en-US" dirty="0"/>
+              <a:t>Add to Call Stack</a:t>
+            </a:r>
+          </a:p>
+        </p:txBody>
+      </p:sp>
+      <p:sp>
+        <p:nvSpPr>
+          <p:cNvPr id="43" name="Rectangle 42">
+            <a:extLst>
+              <a:ext uri="{FF2B5EF4-FFF2-40B4-BE49-F238E27FC236}">
+                <a16:creationId xmlns:a16="http://schemas.microsoft.com/office/drawing/2014/main" id="{B7F91490-534C-2021-3B27-48368084E8EA}"/>
+              </a:ext>
+            </a:extLst>
+          </p:cNvPr>
+          <p:cNvSpPr/>
+          <p:nvPr/>
+        </p:nvSpPr>
+        <p:spPr>
+          <a:xfrm>
+            <a:off x="4294860" y="3646968"/>
+            <a:ext cx="4306186" cy="1201479"/>
+          </a:xfrm>
+          <a:prstGeom prst="rect">
+            <a:avLst/>
+          </a:prstGeom>
+        </p:spPr>
+        <p:style>
+          <a:lnRef idx="2">
+            <a:schemeClr val="accent1">
+              <a:shade val="15000"/>
+            </a:schemeClr>
+          </a:lnRef>
+          <a:fillRef idx="1">
+            <a:schemeClr val="accent1"/>
+          </a:fillRef>
+          <a:effectRef idx="0">
+            <a:schemeClr val="accent1"/>
+          </a:effectRef>
+          <a:fontRef idx="minor">
+            <a:schemeClr val="lt1"/>
+          </a:fontRef>
+        </p:style>
+        <p:txBody>
+          <a:bodyPr rtlCol="0" anchor="t"/>
+          <a:lstStyle/>
+          <a:p>
+            <a:pPr algn="ctr"/>
+            <a:r>
+              <a:rPr lang="en-US" dirty="0"/>
+              <a:t>Promise</a:t>
+            </a:r>
+          </a:p>
+        </p:txBody>
+      </p:sp>
+      <p:sp>
+        <p:nvSpPr>
+          <p:cNvPr id="44" name="Rectangle 43">
+            <a:extLst>
+              <a:ext uri="{FF2B5EF4-FFF2-40B4-BE49-F238E27FC236}">
+                <a16:creationId xmlns:a16="http://schemas.microsoft.com/office/drawing/2014/main" id="{F0805034-1D9D-C5A7-CDFA-996843C92E3E}"/>
+              </a:ext>
+            </a:extLst>
+          </p:cNvPr>
+          <p:cNvSpPr/>
+          <p:nvPr/>
+        </p:nvSpPr>
+        <p:spPr>
+          <a:xfrm>
+            <a:off x="4433969" y="4150243"/>
+            <a:ext cx="1613491" cy="453656"/>
+          </a:xfrm>
+          <a:prstGeom prst="rect">
+            <a:avLst/>
+          </a:prstGeom>
+          <a:solidFill>
+            <a:schemeClr val="accent2"/>
+          </a:solidFill>
+        </p:spPr>
+        <p:style>
+          <a:lnRef idx="2">
+            <a:schemeClr val="accent1">
+              <a:shade val="15000"/>
+            </a:schemeClr>
+          </a:lnRef>
+          <a:fillRef idx="1">
+            <a:schemeClr val="accent1"/>
+          </a:fillRef>
+          <a:effectRef idx="0">
+            <a:schemeClr val="accent1"/>
+          </a:effectRef>
+          <a:fontRef idx="minor">
+            <a:schemeClr val="lt1"/>
+          </a:fontRef>
+        </p:style>
+        <p:txBody>
+          <a:bodyPr rtlCol="0" anchor="ctr"/>
+          <a:lstStyle/>
+          <a:p>
+            <a:pPr algn="ctr"/>
+            <a:r>
+              <a:rPr lang="en-US" dirty="0"/>
+              <a:t>CB</a:t>
+            </a:r>
+          </a:p>
+        </p:txBody>
+      </p:sp>
+      <p:sp>
+        <p:nvSpPr>
+          <p:cNvPr id="45" name="Rectangle 44">
+            <a:extLst>
+              <a:ext uri="{FF2B5EF4-FFF2-40B4-BE49-F238E27FC236}">
+                <a16:creationId xmlns:a16="http://schemas.microsoft.com/office/drawing/2014/main" id="{E00D757B-14E5-6287-022F-6CBD3181A6AE}"/>
+              </a:ext>
+            </a:extLst>
+          </p:cNvPr>
+          <p:cNvSpPr/>
+          <p:nvPr/>
+        </p:nvSpPr>
+        <p:spPr>
+          <a:xfrm>
+            <a:off x="6237073" y="4150243"/>
+            <a:ext cx="1613491" cy="453656"/>
+          </a:xfrm>
+          <a:prstGeom prst="rect">
+            <a:avLst/>
+          </a:prstGeom>
+          <a:solidFill>
+            <a:schemeClr val="accent2"/>
+          </a:solidFill>
+        </p:spPr>
+        <p:style>
+          <a:lnRef idx="2">
+            <a:schemeClr val="accent1">
+              <a:shade val="15000"/>
+            </a:schemeClr>
+          </a:lnRef>
+          <a:fillRef idx="1">
+            <a:schemeClr val="accent1"/>
+          </a:fillRef>
+          <a:effectRef idx="0">
+            <a:schemeClr val="accent1"/>
+          </a:effectRef>
+          <a:fontRef idx="minor">
+            <a:schemeClr val="lt1"/>
+          </a:fontRef>
+        </p:style>
+        <p:txBody>
+          <a:bodyPr rtlCol="0" anchor="ctr"/>
+          <a:lstStyle/>
+          <a:p>
+            <a:pPr algn="ctr"/>
+            <a:r>
+              <a:rPr lang="en-US" dirty="0"/>
+              <a:t>CB</a:t>
+            </a:r>
+          </a:p>
+        </p:txBody>
+      </p:sp>
+      <p:cxnSp>
+        <p:nvCxnSpPr>
+          <p:cNvPr id="47" name="Elbow Connector 46">
+            <a:extLst>
+              <a:ext uri="{FF2B5EF4-FFF2-40B4-BE49-F238E27FC236}">
+                <a16:creationId xmlns:a16="http://schemas.microsoft.com/office/drawing/2014/main" id="{39DEA58A-7982-02A1-22BB-67CD698E659C}"/>
+              </a:ext>
+            </a:extLst>
+          </p:cNvPr>
+          <p:cNvCxnSpPr>
+            <a:stCxn id="43" idx="1"/>
+            <a:endCxn id="33" idx="2"/>
+          </p:cNvCxnSpPr>
+          <p:nvPr/>
+        </p:nvCxnSpPr>
+        <p:spPr>
+          <a:xfrm rot="10800000">
+            <a:off x="3930946" y="3242942"/>
+            <a:ext cx="363915" cy="1004767"/>
+          </a:xfrm>
+          <a:prstGeom prst="bentConnector2">
+            <a:avLst/>
+          </a:prstGeom>
+          <a:ln>
+            <a:tailEnd type="triangle"/>
+          </a:ln>
+        </p:spPr>
+        <p:style>
+          <a:lnRef idx="2">
+            <a:schemeClr val="dk1"/>
+          </a:lnRef>
+          <a:fillRef idx="0">
+            <a:schemeClr val="dk1"/>
+          </a:fillRef>
+          <a:effectRef idx="1">
+            <a:schemeClr val="dk1"/>
+          </a:effectRef>
+          <a:fontRef idx="minor">
+            <a:schemeClr val="tx1"/>
+          </a:fontRef>
+        </p:style>
+      </p:cxnSp>
+      <p:sp>
+        <p:nvSpPr>
+          <p:cNvPr id="48" name="TextBox 47">
+            <a:extLst>
+              <a:ext uri="{FF2B5EF4-FFF2-40B4-BE49-F238E27FC236}">
+                <a16:creationId xmlns:a16="http://schemas.microsoft.com/office/drawing/2014/main" id="{F8BF19D3-B22A-92A5-C9CE-168F49A64E7E}"/>
+              </a:ext>
+            </a:extLst>
+          </p:cNvPr>
+          <p:cNvSpPr txBox="1"/>
+          <p:nvPr/>
+        </p:nvSpPr>
+        <p:spPr>
+          <a:xfrm>
+            <a:off x="5231470" y="1874138"/>
+            <a:ext cx="587020" cy="369332"/>
+          </a:xfrm>
+          <a:prstGeom prst="rect">
+            <a:avLst/>
+          </a:prstGeom>
+          <a:noFill/>
+        </p:spPr>
+        <p:txBody>
+          <a:bodyPr wrap="none" rtlCol="0">
+            <a:spAutoFit/>
+          </a:bodyPr>
+          <a:lstStyle/>
+          <a:p>
+            <a:r>
+              <a:rPr lang="en-US" dirty="0"/>
+              <a:t>Call</a:t>
+            </a:r>
+          </a:p>
+        </p:txBody>
+      </p:sp>
+      <p:sp>
+        <p:nvSpPr>
+          <p:cNvPr id="49" name="Cloud 48">
+            <a:extLst>
+              <a:ext uri="{FF2B5EF4-FFF2-40B4-BE49-F238E27FC236}">
+                <a16:creationId xmlns:a16="http://schemas.microsoft.com/office/drawing/2014/main" id="{31F79321-EC29-95BD-BCE4-D207CD904294}"/>
+              </a:ext>
+            </a:extLst>
+          </p:cNvPr>
+          <p:cNvSpPr/>
+          <p:nvPr/>
+        </p:nvSpPr>
+        <p:spPr>
+          <a:xfrm>
+            <a:off x="1354322" y="5092995"/>
+            <a:ext cx="2488019" cy="1481469"/>
+          </a:xfrm>
+          <a:prstGeom prst="cloud">
+            <a:avLst/>
+          </a:prstGeom>
+        </p:spPr>
+        <p:style>
+          <a:lnRef idx="2">
+            <a:schemeClr val="accent1">
+              <a:shade val="15000"/>
+            </a:schemeClr>
+          </a:lnRef>
+          <a:fillRef idx="1">
+            <a:schemeClr val="accent1"/>
+          </a:fillRef>
+          <a:effectRef idx="0">
+            <a:schemeClr val="accent1"/>
+          </a:effectRef>
+          <a:fontRef idx="minor">
+            <a:schemeClr val="lt1"/>
+          </a:fontRef>
+        </p:style>
+        <p:txBody>
+          <a:bodyPr rtlCol="0" anchor="ctr"/>
+          <a:lstStyle/>
+          <a:p>
+            <a:pPr algn="ctr"/>
+            <a:r>
+              <a:rPr lang="en-US" dirty="0"/>
+              <a:t>Event Loop</a:t>
+            </a:r>
+          </a:p>
+        </p:txBody>
+      </p:sp>
+    </p:spTree>
+    <p:extLst>
+      <p:ext uri="{BB962C8B-B14F-4D97-AF65-F5344CB8AC3E}">
+        <p14:creationId xmlns:p14="http://schemas.microsoft.com/office/powerpoint/2010/main" val="2004792478"/>
       </p:ext>
     </p:extLst>
   </p:cSld>

--- a/ReactJS/Reactjs.pptx
+++ b/ReactJS/Reactjs.pptx
@@ -270,7 +270,7 @@
           <a:p>
             <a:fld id="{E604A9DE-5D16-5148-A31A-5AFF5E45A3E1}" type="datetimeFigureOut">
               <a:rPr lang="en-US" smtClean="0"/>
-              <a:t>4/15/26</a:t>
+              <a:t>4/17/26</a:t>
             </a:fld>
             <a:endParaRPr lang="en-US"/>
           </a:p>
@@ -470,7 +470,7 @@
           <a:p>
             <a:fld id="{E604A9DE-5D16-5148-A31A-5AFF5E45A3E1}" type="datetimeFigureOut">
               <a:rPr lang="en-US" smtClean="0"/>
-              <a:t>4/15/26</a:t>
+              <a:t>4/17/26</a:t>
             </a:fld>
             <a:endParaRPr lang="en-US"/>
           </a:p>
@@ -680,7 +680,7 @@
           <a:p>
             <a:fld id="{E604A9DE-5D16-5148-A31A-5AFF5E45A3E1}" type="datetimeFigureOut">
               <a:rPr lang="en-US" smtClean="0"/>
-              <a:t>4/15/26</a:t>
+              <a:t>4/17/26</a:t>
             </a:fld>
             <a:endParaRPr lang="en-US"/>
           </a:p>
@@ -880,7 +880,7 @@
           <a:p>
             <a:fld id="{E604A9DE-5D16-5148-A31A-5AFF5E45A3E1}" type="datetimeFigureOut">
               <a:rPr lang="en-US" smtClean="0"/>
-              <a:t>4/15/26</a:t>
+              <a:t>4/17/26</a:t>
             </a:fld>
             <a:endParaRPr lang="en-US"/>
           </a:p>
@@ -1156,7 +1156,7 @@
           <a:p>
             <a:fld id="{E604A9DE-5D16-5148-A31A-5AFF5E45A3E1}" type="datetimeFigureOut">
               <a:rPr lang="en-US" smtClean="0"/>
-              <a:t>4/15/26</a:t>
+              <a:t>4/17/26</a:t>
             </a:fld>
             <a:endParaRPr lang="en-US"/>
           </a:p>
@@ -1424,7 +1424,7 @@
           <a:p>
             <a:fld id="{E604A9DE-5D16-5148-A31A-5AFF5E45A3E1}" type="datetimeFigureOut">
               <a:rPr lang="en-US" smtClean="0"/>
-              <a:t>4/15/26</a:t>
+              <a:t>4/17/26</a:t>
             </a:fld>
             <a:endParaRPr lang="en-US"/>
           </a:p>
@@ -1839,7 +1839,7 @@
           <a:p>
             <a:fld id="{E604A9DE-5D16-5148-A31A-5AFF5E45A3E1}" type="datetimeFigureOut">
               <a:rPr lang="en-US" smtClean="0"/>
-              <a:t>4/15/26</a:t>
+              <a:t>4/17/26</a:t>
             </a:fld>
             <a:endParaRPr lang="en-US"/>
           </a:p>
@@ -1981,7 +1981,7 @@
           <a:p>
             <a:fld id="{E604A9DE-5D16-5148-A31A-5AFF5E45A3E1}" type="datetimeFigureOut">
               <a:rPr lang="en-US" smtClean="0"/>
-              <a:t>4/15/26</a:t>
+              <a:t>4/17/26</a:t>
             </a:fld>
             <a:endParaRPr lang="en-US"/>
           </a:p>
@@ -2094,7 +2094,7 @@
           <a:p>
             <a:fld id="{E604A9DE-5D16-5148-A31A-5AFF5E45A3E1}" type="datetimeFigureOut">
               <a:rPr lang="en-US" smtClean="0"/>
-              <a:t>4/15/26</a:t>
+              <a:t>4/17/26</a:t>
             </a:fld>
             <a:endParaRPr lang="en-US"/>
           </a:p>
@@ -2407,7 +2407,7 @@
           <a:p>
             <a:fld id="{E604A9DE-5D16-5148-A31A-5AFF5E45A3E1}" type="datetimeFigureOut">
               <a:rPr lang="en-US" smtClean="0"/>
-              <a:t>4/15/26</a:t>
+              <a:t>4/17/26</a:t>
             </a:fld>
             <a:endParaRPr lang="en-US"/>
           </a:p>
@@ -2696,7 +2696,7 @@
           <a:p>
             <a:fld id="{E604A9DE-5D16-5148-A31A-5AFF5E45A3E1}" type="datetimeFigureOut">
               <a:rPr lang="en-US" smtClean="0"/>
-              <a:t>4/15/26</a:t>
+              <a:t>4/17/26</a:t>
             </a:fld>
             <a:endParaRPr lang="en-US"/>
           </a:p>
@@ -2939,7 +2939,7 @@
           <a:p>
             <a:fld id="{E604A9DE-5D16-5148-A31A-5AFF5E45A3E1}" type="datetimeFigureOut">
               <a:rPr lang="en-US" smtClean="0"/>
-              <a:t>4/15/26</a:t>
+              <a:t>4/17/26</a:t>
             </a:fld>
             <a:endParaRPr lang="en-US"/>
           </a:p>
@@ -3484,7 +3484,7 @@
         <p:spPr>
           <a:xfrm>
             <a:off x="841664" y="550718"/>
-            <a:ext cx="2748894" cy="923330"/>
+            <a:ext cx="3004349" cy="2031325"/>
           </a:xfrm>
           <a:prstGeom prst="rect">
             <a:avLst/>
@@ -3524,6 +3524,35 @@
             <a:r>
               <a:rPr lang="en-US" dirty="0" err="1"/>
               <a:t>setTasklist</a:t>
+            </a:r>
+            <a:endParaRPr lang="en-US" dirty="0"/>
+          </a:p>
+          <a:p>
+            <a:r>
+              <a:rPr lang="en-US" dirty="0"/>
+              <a:t>Function Edit &amp; Delete</a:t>
+            </a:r>
+          </a:p>
+          <a:p>
+            <a:r>
+              <a:rPr lang="en-US" dirty="0"/>
+              <a:t>Warning Undefined Value</a:t>
+            </a:r>
+          </a:p>
+          <a:p>
+            <a:r>
+              <a:rPr lang="en-US" dirty="0"/>
+              <a:t>Local Storage Store All Tasks</a:t>
+            </a:r>
+          </a:p>
+          <a:p>
+            <a:r>
+              <a:rPr lang="en-US" dirty="0"/>
+              <a:t>Theme </a:t>
+            </a:r>
+            <a:r>
+              <a:rPr lang="en-US"/>
+              <a:t>Change Background</a:t>
             </a:r>
             <a:endParaRPr lang="en-US" dirty="0"/>
           </a:p>

--- a/ReactJS/Reactjs.pptx
+++ b/ReactJS/Reactjs.pptx
@@ -15,6 +15,7 @@
     <p:sldId id="263" r:id="rId9"/>
     <p:sldId id="264" r:id="rId10"/>
     <p:sldId id="265" r:id="rId11"/>
+    <p:sldId id="266" r:id="rId12"/>
   </p:sldIdLst>
   <p:sldSz cx="12192000" cy="6858000"/>
   <p:notesSz cx="6858000" cy="9144000"/>
@@ -270,7 +271,7 @@
           <a:p>
             <a:fld id="{E604A9DE-5D16-5148-A31A-5AFF5E45A3E1}" type="datetimeFigureOut">
               <a:rPr lang="en-US" smtClean="0"/>
-              <a:t>4/17/26</a:t>
+              <a:t>4/22/26</a:t>
             </a:fld>
             <a:endParaRPr lang="en-US"/>
           </a:p>
@@ -470,7 +471,7 @@
           <a:p>
             <a:fld id="{E604A9DE-5D16-5148-A31A-5AFF5E45A3E1}" type="datetimeFigureOut">
               <a:rPr lang="en-US" smtClean="0"/>
-              <a:t>4/17/26</a:t>
+              <a:t>4/22/26</a:t>
             </a:fld>
             <a:endParaRPr lang="en-US"/>
           </a:p>
@@ -680,7 +681,7 @@
           <a:p>
             <a:fld id="{E604A9DE-5D16-5148-A31A-5AFF5E45A3E1}" type="datetimeFigureOut">
               <a:rPr lang="en-US" smtClean="0"/>
-              <a:t>4/17/26</a:t>
+              <a:t>4/22/26</a:t>
             </a:fld>
             <a:endParaRPr lang="en-US"/>
           </a:p>
@@ -880,7 +881,7 @@
           <a:p>
             <a:fld id="{E604A9DE-5D16-5148-A31A-5AFF5E45A3E1}" type="datetimeFigureOut">
               <a:rPr lang="en-US" smtClean="0"/>
-              <a:t>4/17/26</a:t>
+              <a:t>4/22/26</a:t>
             </a:fld>
             <a:endParaRPr lang="en-US"/>
           </a:p>
@@ -1156,7 +1157,7 @@
           <a:p>
             <a:fld id="{E604A9DE-5D16-5148-A31A-5AFF5E45A3E1}" type="datetimeFigureOut">
               <a:rPr lang="en-US" smtClean="0"/>
-              <a:t>4/17/26</a:t>
+              <a:t>4/22/26</a:t>
             </a:fld>
             <a:endParaRPr lang="en-US"/>
           </a:p>
@@ -1424,7 +1425,7 @@
           <a:p>
             <a:fld id="{E604A9DE-5D16-5148-A31A-5AFF5E45A3E1}" type="datetimeFigureOut">
               <a:rPr lang="en-US" smtClean="0"/>
-              <a:t>4/17/26</a:t>
+              <a:t>4/22/26</a:t>
             </a:fld>
             <a:endParaRPr lang="en-US"/>
           </a:p>
@@ -1839,7 +1840,7 @@
           <a:p>
             <a:fld id="{E604A9DE-5D16-5148-A31A-5AFF5E45A3E1}" type="datetimeFigureOut">
               <a:rPr lang="en-US" smtClean="0"/>
-              <a:t>4/17/26</a:t>
+              <a:t>4/22/26</a:t>
             </a:fld>
             <a:endParaRPr lang="en-US"/>
           </a:p>
@@ -1981,7 +1982,7 @@
           <a:p>
             <a:fld id="{E604A9DE-5D16-5148-A31A-5AFF5E45A3E1}" type="datetimeFigureOut">
               <a:rPr lang="en-US" smtClean="0"/>
-              <a:t>4/17/26</a:t>
+              <a:t>4/22/26</a:t>
             </a:fld>
             <a:endParaRPr lang="en-US"/>
           </a:p>
@@ -2094,7 +2095,7 @@
           <a:p>
             <a:fld id="{E604A9DE-5D16-5148-A31A-5AFF5E45A3E1}" type="datetimeFigureOut">
               <a:rPr lang="en-US" smtClean="0"/>
-              <a:t>4/17/26</a:t>
+              <a:t>4/22/26</a:t>
             </a:fld>
             <a:endParaRPr lang="en-US"/>
           </a:p>
@@ -2407,7 +2408,7 @@
           <a:p>
             <a:fld id="{E604A9DE-5D16-5148-A31A-5AFF5E45A3E1}" type="datetimeFigureOut">
               <a:rPr lang="en-US" smtClean="0"/>
-              <a:t>4/17/26</a:t>
+              <a:t>4/22/26</a:t>
             </a:fld>
             <a:endParaRPr lang="en-US"/>
           </a:p>
@@ -2696,7 +2697,7 @@
           <a:p>
             <a:fld id="{E604A9DE-5D16-5148-A31A-5AFF5E45A3E1}" type="datetimeFigureOut">
               <a:rPr lang="en-US" smtClean="0"/>
-              <a:t>4/17/26</a:t>
+              <a:t>4/22/26</a:t>
             </a:fld>
             <a:endParaRPr lang="en-US"/>
           </a:p>
@@ -2939,7 +2940,7 @@
           <a:p>
             <a:fld id="{E604A9DE-5D16-5148-A31A-5AFF5E45A3E1}" type="datetimeFigureOut">
               <a:rPr lang="en-US" smtClean="0"/>
-              <a:t>4/17/26</a:t>
+              <a:t>4/22/26</a:t>
             </a:fld>
             <a:endParaRPr lang="en-US"/>
           </a:p>
@@ -3484,7 +3485,7 @@
         <p:spPr>
           <a:xfrm>
             <a:off x="841664" y="550718"/>
-            <a:ext cx="3004349" cy="2031325"/>
+            <a:ext cx="10411691" cy="5509200"/>
           </a:xfrm>
           <a:prstGeom prst="rect">
             <a:avLst/>
@@ -3492,69 +3493,67 @@
           <a:noFill/>
         </p:spPr>
         <p:txBody>
-          <a:bodyPr wrap="none" rtlCol="0">
+          <a:bodyPr wrap="square" rtlCol="0">
             <a:spAutoFit/>
           </a:bodyPr>
           <a:lstStyle/>
           <a:p>
             <a:r>
-              <a:rPr lang="en-US" dirty="0"/>
+              <a:rPr lang="en-US" sz="4400" dirty="0"/>
               <a:t>Project Structure</a:t>
             </a:r>
           </a:p>
           <a:p>
             <a:r>
-              <a:rPr lang="en-US" dirty="0"/>
+              <a:rPr lang="en-US" sz="4400" dirty="0"/>
               <a:t>Components</a:t>
             </a:r>
           </a:p>
           <a:p>
             <a:r>
-              <a:rPr lang="en-US" dirty="0"/>
+              <a:rPr lang="en-US" sz="4400" dirty="0"/>
               <a:t>State </a:t>
             </a:r>
             <a:r>
-              <a:rPr lang="en-US" dirty="0" err="1"/>
+              <a:rPr lang="en-US" sz="4400" dirty="0" err="1"/>
               <a:t>tasklist</a:t>
             </a:r>
             <a:r>
-              <a:rPr lang="en-US" dirty="0"/>
+              <a:rPr lang="en-US" sz="4400" dirty="0"/>
               <a:t> &amp; </a:t>
             </a:r>
             <a:r>
-              <a:rPr lang="en-US" dirty="0" err="1"/>
+              <a:rPr lang="en-US" sz="4400" dirty="0" err="1"/>
               <a:t>setTasklist</a:t>
             </a:r>
-            <a:endParaRPr lang="en-US" dirty="0"/>
-          </a:p>
-          <a:p>
-            <a:r>
-              <a:rPr lang="en-US" dirty="0"/>
+            <a:endParaRPr lang="en-US" sz="4400" dirty="0"/>
+          </a:p>
+          <a:p>
+            <a:r>
+              <a:rPr lang="en-US" sz="4400" dirty="0"/>
               <a:t>Function Edit &amp; Delete</a:t>
             </a:r>
           </a:p>
           <a:p>
             <a:r>
-              <a:rPr lang="en-US" dirty="0"/>
+              <a:rPr lang="en-US" sz="4400" dirty="0"/>
               <a:t>Warning Undefined Value</a:t>
             </a:r>
           </a:p>
           <a:p>
             <a:r>
-              <a:rPr lang="en-US" dirty="0"/>
+              <a:rPr lang="en-US" sz="4400" dirty="0"/>
               <a:t>Local Storage Store All Tasks</a:t>
             </a:r>
           </a:p>
           <a:p>
             <a:r>
-              <a:rPr lang="en-US" dirty="0"/>
-              <a:t>Theme </a:t>
-            </a:r>
-            <a:r>
-              <a:rPr lang="en-US"/>
-              <a:t>Change Background</a:t>
-            </a:r>
-            <a:endParaRPr lang="en-US" dirty="0"/>
+              <a:rPr lang="en-US" sz="4400" dirty="0"/>
+              <a:t>Theme Change Background</a:t>
+            </a:r>
+          </a:p>
+          <a:p>
+            <a:endParaRPr lang="en-US" sz="4400" dirty="0"/>
           </a:p>
         </p:txBody>
       </p:sp>
@@ -3562,6 +3561,216 @@
     <p:extLst>
       <p:ext uri="{BB962C8B-B14F-4D97-AF65-F5344CB8AC3E}">
         <p14:creationId xmlns:p14="http://schemas.microsoft.com/office/powerpoint/2010/main" val="828786990"/>
+      </p:ext>
+    </p:extLst>
+  </p:cSld>
+  <p:clrMapOvr>
+    <a:masterClrMapping/>
+  </p:clrMapOvr>
+</p:sld>
+</file>
+
+<file path=ppt/slides/slide11.xml><?xml version="1.0" encoding="utf-8"?>
+<p:sld xmlns:a="http://schemas.openxmlformats.org/drawingml/2006/main" xmlns:r="http://schemas.openxmlformats.org/officeDocument/2006/relationships" xmlns:p="http://schemas.openxmlformats.org/presentationml/2006/main">
+  <p:cSld>
+    <p:spTree>
+      <p:nvGrpSpPr>
+        <p:cNvPr id="1" name="">
+          <a:extLst>
+            <a:ext uri="{FF2B5EF4-FFF2-40B4-BE49-F238E27FC236}">
+              <a16:creationId xmlns:a16="http://schemas.microsoft.com/office/drawing/2014/main" id="{CC83A56D-C570-7095-B214-10CA0CD06998}"/>
+            </a:ext>
+          </a:extLst>
+        </p:cNvPr>
+        <p:cNvGrpSpPr/>
+        <p:nvPr/>
+      </p:nvGrpSpPr>
+      <p:grpSpPr>
+        <a:xfrm>
+          <a:off x="0" y="0"/>
+          <a:ext cx="0" cy="0"/>
+          <a:chOff x="0" y="0"/>
+          <a:chExt cx="0" cy="0"/>
+        </a:xfrm>
+      </p:grpSpPr>
+      <p:sp>
+        <p:nvSpPr>
+          <p:cNvPr id="2" name="TextBox 1">
+            <a:extLst>
+              <a:ext uri="{FF2B5EF4-FFF2-40B4-BE49-F238E27FC236}">
+                <a16:creationId xmlns:a16="http://schemas.microsoft.com/office/drawing/2014/main" id="{AC111DA7-B802-D359-A660-1A157F60EE4A}"/>
+              </a:ext>
+            </a:extLst>
+          </p:cNvPr>
+          <p:cNvSpPr txBox="1"/>
+          <p:nvPr/>
+        </p:nvSpPr>
+        <p:spPr>
+          <a:xfrm>
+            <a:off x="841664" y="550718"/>
+            <a:ext cx="10411691" cy="6186309"/>
+          </a:xfrm>
+          <a:prstGeom prst="rect">
+            <a:avLst/>
+          </a:prstGeom>
+          <a:noFill/>
+        </p:spPr>
+        <p:txBody>
+          <a:bodyPr wrap="square" numCol="2" rtlCol="0">
+            <a:spAutoFit/>
+          </a:bodyPr>
+          <a:lstStyle/>
+          <a:p>
+            <a:r>
+              <a:rPr lang="en-US" dirty="0"/>
+              <a:t>Introduction React Router</a:t>
+            </a:r>
+          </a:p>
+          <a:p>
+            <a:r>
+              <a:rPr lang="en-US" dirty="0"/>
+              <a:t>React Router is used in application to navigate between pages without reloading the browser.</a:t>
+            </a:r>
+          </a:p>
+          <a:p>
+            <a:r>
+              <a:rPr lang="en-US" dirty="0"/>
+              <a:t>React Router setup</a:t>
+            </a:r>
+          </a:p>
+          <a:p>
+            <a:r>
+              <a:rPr lang="en-US" dirty="0"/>
+              <a:t>Project Structure</a:t>
+            </a:r>
+          </a:p>
+          <a:p>
+            <a:r>
+              <a:rPr lang="en-US" dirty="0"/>
+              <a:t>Navigation</a:t>
+            </a:r>
+          </a:p>
+          <a:p>
+            <a:r>
+              <a:rPr lang="en-US" dirty="0"/>
+              <a:t>&lt;Link to=&gt; replace &lt;a&gt; tags</a:t>
+            </a:r>
+          </a:p>
+          <a:p>
+            <a:r>
+              <a:rPr lang="en-US" dirty="0"/>
+              <a:t>			No page reload</a:t>
+            </a:r>
+          </a:p>
+          <a:p>
+            <a:r>
+              <a:rPr lang="en-US" dirty="0"/>
+              <a:t>			Faster navigation </a:t>
+            </a:r>
+          </a:p>
+          <a:p>
+            <a:r>
+              <a:rPr lang="en-US" dirty="0"/>
+              <a:t>			Keeps app as SPA (Single Page Application)</a:t>
+            </a:r>
+          </a:p>
+          <a:p>
+            <a:r>
+              <a:rPr lang="en-US" dirty="0" err="1"/>
+              <a:t>useNavigate</a:t>
+            </a:r>
+            <a:r>
+              <a:rPr lang="en-US" dirty="0"/>
+              <a:t> – sometimes we don’t click a link – </a:t>
+            </a:r>
+          </a:p>
+          <a:p>
+            <a:r>
+              <a:rPr lang="en-US" dirty="0"/>
+              <a:t>			After form submission</a:t>
+            </a:r>
+          </a:p>
+          <a:p>
+            <a:r>
+              <a:rPr lang="en-US" dirty="0"/>
+              <a:t>			After login/logout</a:t>
+            </a:r>
+          </a:p>
+          <a:p>
+            <a:r>
+              <a:rPr lang="en-US" dirty="0"/>
+              <a:t>			Conditional redirects</a:t>
+            </a:r>
+          </a:p>
+          <a:p>
+            <a:r>
+              <a:rPr lang="en-US" dirty="0"/>
+              <a:t>Navigate with Parameters</a:t>
+            </a:r>
+          </a:p>
+          <a:p>
+            <a:r>
+              <a:rPr lang="en-US" dirty="0"/>
+              <a:t>			/product/1001</a:t>
+            </a:r>
+          </a:p>
+          <a:p>
+            <a:r>
+              <a:rPr lang="en-US" dirty="0"/>
+              <a:t>Navigation with state</a:t>
+            </a:r>
+          </a:p>
+          <a:p>
+            <a:endParaRPr lang="en-US" dirty="0"/>
+          </a:p>
+          <a:p>
+            <a:r>
+              <a:rPr lang="en-US" dirty="0" err="1"/>
+              <a:t>NavLink</a:t>
+            </a:r>
+            <a:r>
+              <a:rPr lang="en-US" dirty="0"/>
+              <a:t>- styling for active page</a:t>
+            </a:r>
+          </a:p>
+          <a:p>
+            <a:r>
+              <a:rPr lang="en-US" dirty="0"/>
+              <a:t>Route Parameters</a:t>
+            </a:r>
+          </a:p>
+          <a:p>
+            <a:r>
+              <a:rPr lang="en-US" dirty="0" err="1"/>
+              <a:t>searchParam</a:t>
+            </a:r>
+            <a:endParaRPr lang="en-US" dirty="0"/>
+          </a:p>
+          <a:p>
+            <a:r>
+              <a:rPr lang="en-US" dirty="0"/>
+              <a:t>Location</a:t>
+            </a:r>
+          </a:p>
+          <a:p>
+            <a:r>
+              <a:rPr lang="en-US" dirty="0"/>
+              <a:t>No route Found</a:t>
+            </a:r>
+          </a:p>
+          <a:p>
+            <a:r>
+              <a:rPr lang="en-US"/>
+              <a:t>Nested routes</a:t>
+            </a:r>
+            <a:endParaRPr lang="en-US" dirty="0"/>
+          </a:p>
+        </p:txBody>
+      </p:sp>
+    </p:spTree>
+    <p:extLst>
+      <p:ext uri="{BB962C8B-B14F-4D97-AF65-F5344CB8AC3E}">
+        <p14:creationId xmlns:p14="http://schemas.microsoft.com/office/powerpoint/2010/main" val="4266928525"/>
       </p:ext>
     </p:extLst>
   </p:cSld>

--- a/ReactJS/Reactjs.pptx
+++ b/ReactJS/Reactjs.pptx
@@ -16,6 +16,8 @@
     <p:sldId id="264" r:id="rId10"/>
     <p:sldId id="265" r:id="rId11"/>
     <p:sldId id="266" r:id="rId12"/>
+    <p:sldId id="267" r:id="rId13"/>
+    <p:sldId id="268" r:id="rId14"/>
   </p:sldIdLst>
   <p:sldSz cx="12192000" cy="6858000"/>
   <p:notesSz cx="6858000" cy="9144000"/>
@@ -271,7 +273,7 @@
           <a:p>
             <a:fld id="{E604A9DE-5D16-5148-A31A-5AFF5E45A3E1}" type="datetimeFigureOut">
               <a:rPr lang="en-US" smtClean="0"/>
-              <a:t>4/22/26</a:t>
+              <a:t>4/30/26</a:t>
             </a:fld>
             <a:endParaRPr lang="en-US"/>
           </a:p>
@@ -471,7 +473,7 @@
           <a:p>
             <a:fld id="{E604A9DE-5D16-5148-A31A-5AFF5E45A3E1}" type="datetimeFigureOut">
               <a:rPr lang="en-US" smtClean="0"/>
-              <a:t>4/22/26</a:t>
+              <a:t>4/30/26</a:t>
             </a:fld>
             <a:endParaRPr lang="en-US"/>
           </a:p>
@@ -681,7 +683,7 @@
           <a:p>
             <a:fld id="{E604A9DE-5D16-5148-A31A-5AFF5E45A3E1}" type="datetimeFigureOut">
               <a:rPr lang="en-US" smtClean="0"/>
-              <a:t>4/22/26</a:t>
+              <a:t>4/30/26</a:t>
             </a:fld>
             <a:endParaRPr lang="en-US"/>
           </a:p>
@@ -881,7 +883,7 @@
           <a:p>
             <a:fld id="{E604A9DE-5D16-5148-A31A-5AFF5E45A3E1}" type="datetimeFigureOut">
               <a:rPr lang="en-US" smtClean="0"/>
-              <a:t>4/22/26</a:t>
+              <a:t>4/30/26</a:t>
             </a:fld>
             <a:endParaRPr lang="en-US"/>
           </a:p>
@@ -1157,7 +1159,7 @@
           <a:p>
             <a:fld id="{E604A9DE-5D16-5148-A31A-5AFF5E45A3E1}" type="datetimeFigureOut">
               <a:rPr lang="en-US" smtClean="0"/>
-              <a:t>4/22/26</a:t>
+              <a:t>4/30/26</a:t>
             </a:fld>
             <a:endParaRPr lang="en-US"/>
           </a:p>
@@ -1425,7 +1427,7 @@
           <a:p>
             <a:fld id="{E604A9DE-5D16-5148-A31A-5AFF5E45A3E1}" type="datetimeFigureOut">
               <a:rPr lang="en-US" smtClean="0"/>
-              <a:t>4/22/26</a:t>
+              <a:t>4/30/26</a:t>
             </a:fld>
             <a:endParaRPr lang="en-US"/>
           </a:p>
@@ -1840,7 +1842,7 @@
           <a:p>
             <a:fld id="{E604A9DE-5D16-5148-A31A-5AFF5E45A3E1}" type="datetimeFigureOut">
               <a:rPr lang="en-US" smtClean="0"/>
-              <a:t>4/22/26</a:t>
+              <a:t>4/30/26</a:t>
             </a:fld>
             <a:endParaRPr lang="en-US"/>
           </a:p>
@@ -1982,7 +1984,7 @@
           <a:p>
             <a:fld id="{E604A9DE-5D16-5148-A31A-5AFF5E45A3E1}" type="datetimeFigureOut">
               <a:rPr lang="en-US" smtClean="0"/>
-              <a:t>4/22/26</a:t>
+              <a:t>4/30/26</a:t>
             </a:fld>
             <a:endParaRPr lang="en-US"/>
           </a:p>
@@ -2095,7 +2097,7 @@
           <a:p>
             <a:fld id="{E604A9DE-5D16-5148-A31A-5AFF5E45A3E1}" type="datetimeFigureOut">
               <a:rPr lang="en-US" smtClean="0"/>
-              <a:t>4/22/26</a:t>
+              <a:t>4/30/26</a:t>
             </a:fld>
             <a:endParaRPr lang="en-US"/>
           </a:p>
@@ -2408,7 +2410,7 @@
           <a:p>
             <a:fld id="{E604A9DE-5D16-5148-A31A-5AFF5E45A3E1}" type="datetimeFigureOut">
               <a:rPr lang="en-US" smtClean="0"/>
-              <a:t>4/22/26</a:t>
+              <a:t>4/30/26</a:t>
             </a:fld>
             <a:endParaRPr lang="en-US"/>
           </a:p>
@@ -2697,7 +2699,7 @@
           <a:p>
             <a:fld id="{E604A9DE-5D16-5148-A31A-5AFF5E45A3E1}" type="datetimeFigureOut">
               <a:rPr lang="en-US" smtClean="0"/>
-              <a:t>4/22/26</a:t>
+              <a:t>4/30/26</a:t>
             </a:fld>
             <a:endParaRPr lang="en-US"/>
           </a:p>
@@ -2940,7 +2942,7 @@
           <a:p>
             <a:fld id="{E604A9DE-5D16-5148-A31A-5AFF5E45A3E1}" type="datetimeFigureOut">
               <a:rPr lang="en-US" smtClean="0"/>
-              <a:t>4/22/26</a:t>
+              <a:t>4/30/26</a:t>
             </a:fld>
             <a:endParaRPr lang="en-US"/>
           </a:p>
@@ -3760,9 +3762,17 @@
           </a:p>
           <a:p>
             <a:r>
-              <a:rPr lang="en-US"/>
+              <a:rPr lang="en-US" dirty="0"/>
               <a:t>Nested routes</a:t>
             </a:r>
+          </a:p>
+          <a:p>
+            <a:r>
+              <a:rPr lang="en-US" dirty="0"/>
+              <a:t>Project Restructuring</a:t>
+            </a:r>
+          </a:p>
+          <a:p>
             <a:endParaRPr lang="en-US" dirty="0"/>
           </a:p>
         </p:txBody>
@@ -3771,6 +3781,271 @@
     <p:extLst>
       <p:ext uri="{BB962C8B-B14F-4D97-AF65-F5344CB8AC3E}">
         <p14:creationId xmlns:p14="http://schemas.microsoft.com/office/powerpoint/2010/main" val="4266928525"/>
+      </p:ext>
+    </p:extLst>
+  </p:cSld>
+  <p:clrMapOvr>
+    <a:masterClrMapping/>
+  </p:clrMapOvr>
+</p:sld>
+</file>
+
+<file path=ppt/slides/slide12.xml><?xml version="1.0" encoding="utf-8"?>
+<p:sld xmlns:a="http://schemas.openxmlformats.org/drawingml/2006/main" xmlns:r="http://schemas.openxmlformats.org/officeDocument/2006/relationships" xmlns:p="http://schemas.openxmlformats.org/presentationml/2006/main">
+  <p:cSld>
+    <p:spTree>
+      <p:nvGrpSpPr>
+        <p:cNvPr id="1" name=""/>
+        <p:cNvGrpSpPr/>
+        <p:nvPr/>
+      </p:nvGrpSpPr>
+      <p:grpSpPr>
+        <a:xfrm>
+          <a:off x="0" y="0"/>
+          <a:ext cx="0" cy="0"/>
+          <a:chOff x="0" y="0"/>
+          <a:chExt cx="0" cy="0"/>
+        </a:xfrm>
+      </p:grpSpPr>
+      <p:sp>
+        <p:nvSpPr>
+          <p:cNvPr id="2" name="Title 1">
+            <a:extLst>
+              <a:ext uri="{FF2B5EF4-FFF2-40B4-BE49-F238E27FC236}">
+                <a16:creationId xmlns:a16="http://schemas.microsoft.com/office/drawing/2014/main" id="{E1F7AA66-5792-650E-05BF-5809827D46BB}"/>
+              </a:ext>
+            </a:extLst>
+          </p:cNvPr>
+          <p:cNvSpPr>
+            <a:spLocks noGrp="1"/>
+          </p:cNvSpPr>
+          <p:nvPr>
+            <p:ph type="title"/>
+          </p:nvPr>
+        </p:nvSpPr>
+        <p:spPr/>
+        <p:txBody>
+          <a:bodyPr/>
+          <a:lstStyle/>
+          <a:p>
+            <a:r>
+              <a:rPr lang="en-US" dirty="0" err="1"/>
+              <a:t>Tailwindcss</a:t>
+            </a:r>
+            <a:br>
+              <a:rPr lang="en-US" dirty="0"/>
+            </a:br>
+            <a:endParaRPr lang="en-US" dirty="0"/>
+          </a:p>
+        </p:txBody>
+      </p:sp>
+      <p:sp>
+        <p:nvSpPr>
+          <p:cNvPr id="3" name="Content Placeholder 2">
+            <a:extLst>
+              <a:ext uri="{FF2B5EF4-FFF2-40B4-BE49-F238E27FC236}">
+                <a16:creationId xmlns:a16="http://schemas.microsoft.com/office/drawing/2014/main" id="{6B29F1E7-E5C7-B842-01BC-D8A8D7A73417}"/>
+              </a:ext>
+            </a:extLst>
+          </p:cNvPr>
+          <p:cNvSpPr>
+            <a:spLocks noGrp="1"/>
+          </p:cNvSpPr>
+          <p:nvPr>
+            <p:ph idx="1"/>
+          </p:nvPr>
+        </p:nvSpPr>
+        <p:spPr/>
+        <p:txBody>
+          <a:bodyPr>
+            <a:normAutofit lnSpcReduction="10000"/>
+          </a:bodyPr>
+          <a:lstStyle/>
+          <a:p>
+            <a:r>
+              <a:rPr lang="en-US" dirty="0"/>
+              <a:t>Common properties</a:t>
+            </a:r>
+          </a:p>
+          <a:p>
+            <a:r>
+              <a:rPr lang="en-US" dirty="0"/>
+              <a:t>Hover, focus and other States</a:t>
+            </a:r>
+          </a:p>
+          <a:p>
+            <a:r>
+              <a:rPr lang="en-US" dirty="0"/>
+              <a:t>Responsive Design</a:t>
+            </a:r>
+          </a:p>
+          <a:p>
+            <a:r>
+              <a:rPr lang="en-US" dirty="0"/>
+              <a:t>Dark Mode</a:t>
+            </a:r>
+          </a:p>
+          <a:p>
+            <a:r>
+              <a:rPr lang="en-US" dirty="0"/>
+              <a:t>Custom configuration</a:t>
+            </a:r>
+          </a:p>
+          <a:p>
+            <a:r>
+              <a:rPr lang="en-US" dirty="0"/>
+              <a:t>Project Demo</a:t>
+            </a:r>
+          </a:p>
+          <a:p>
+            <a:r>
+              <a:rPr lang="en-US" dirty="0"/>
+              <a:t>Header &amp; Hero Section</a:t>
+            </a:r>
+          </a:p>
+          <a:p>
+            <a:r>
+              <a:rPr lang="en-US" dirty="0"/>
+              <a:t>Footer</a:t>
+            </a:r>
+          </a:p>
+          <a:p>
+            <a:r>
+              <a:rPr lang="en-US" dirty="0"/>
+              <a:t>Responsive Screen &amp; component tools</a:t>
+            </a:r>
+          </a:p>
+          <a:p>
+            <a:endParaRPr lang="en-US" dirty="0"/>
+          </a:p>
+        </p:txBody>
+      </p:sp>
+    </p:spTree>
+    <p:extLst>
+      <p:ext uri="{BB962C8B-B14F-4D97-AF65-F5344CB8AC3E}">
+        <p14:creationId xmlns:p14="http://schemas.microsoft.com/office/powerpoint/2010/main" val="627107819"/>
+      </p:ext>
+    </p:extLst>
+  </p:cSld>
+  <p:clrMapOvr>
+    <a:masterClrMapping/>
+  </p:clrMapOvr>
+</p:sld>
+</file>
+
+<file path=ppt/slides/slide13.xml><?xml version="1.0" encoding="utf-8"?>
+<p:sld xmlns:a="http://schemas.openxmlformats.org/drawingml/2006/main" xmlns:r="http://schemas.openxmlformats.org/officeDocument/2006/relationships" xmlns:p="http://schemas.openxmlformats.org/presentationml/2006/main">
+  <p:cSld>
+    <p:spTree>
+      <p:nvGrpSpPr>
+        <p:cNvPr id="1" name=""/>
+        <p:cNvGrpSpPr/>
+        <p:nvPr/>
+      </p:nvGrpSpPr>
+      <p:grpSpPr>
+        <a:xfrm>
+          <a:off x="0" y="0"/>
+          <a:ext cx="0" cy="0"/>
+          <a:chOff x="0" y="0"/>
+          <a:chExt cx="0" cy="0"/>
+        </a:xfrm>
+      </p:grpSpPr>
+      <p:sp>
+        <p:nvSpPr>
+          <p:cNvPr id="2" name="Title 1">
+            <a:extLst>
+              <a:ext uri="{FF2B5EF4-FFF2-40B4-BE49-F238E27FC236}">
+                <a16:creationId xmlns:a16="http://schemas.microsoft.com/office/drawing/2014/main" id="{65AE7A3B-D072-C9D6-C3E3-581267BCB881}"/>
+              </a:ext>
+            </a:extLst>
+          </p:cNvPr>
+          <p:cNvSpPr>
+            <a:spLocks noGrp="1"/>
+          </p:cNvSpPr>
+          <p:nvPr>
+            <p:ph type="title"/>
+          </p:nvPr>
+        </p:nvSpPr>
+        <p:spPr/>
+        <p:txBody>
+          <a:bodyPr/>
+          <a:lstStyle/>
+          <a:p>
+            <a:r>
+              <a:rPr lang="en-US" dirty="0" err="1"/>
+              <a:t>cinemate</a:t>
+            </a:r>
+            <a:endParaRPr lang="en-US" dirty="0"/>
+          </a:p>
+        </p:txBody>
+      </p:sp>
+      <p:sp>
+        <p:nvSpPr>
+          <p:cNvPr id="3" name="Content Placeholder 2">
+            <a:extLst>
+              <a:ext uri="{FF2B5EF4-FFF2-40B4-BE49-F238E27FC236}">
+                <a16:creationId xmlns:a16="http://schemas.microsoft.com/office/drawing/2014/main" id="{13B8F2F8-F890-6326-5520-17BB7A4C843B}"/>
+              </a:ext>
+            </a:extLst>
+          </p:cNvPr>
+          <p:cNvSpPr>
+            <a:spLocks noGrp="1"/>
+          </p:cNvSpPr>
+          <p:nvPr>
+            <p:ph idx="1"/>
+          </p:nvPr>
+        </p:nvSpPr>
+        <p:spPr/>
+        <p:txBody>
+          <a:bodyPr/>
+          <a:lstStyle/>
+          <a:p>
+            <a:r>
+              <a:rPr lang="en-US" dirty="0"/>
+              <a:t>Project demo</a:t>
+            </a:r>
+          </a:p>
+          <a:p>
+            <a:r>
+              <a:rPr lang="en-US" dirty="0"/>
+              <a:t>Project Setup</a:t>
+            </a:r>
+          </a:p>
+          <a:p>
+            <a:r>
+              <a:rPr lang="en-US" dirty="0"/>
+              <a:t>Tailwind intro</a:t>
+            </a:r>
+          </a:p>
+          <a:p>
+            <a:r>
+              <a:rPr lang="en-US" dirty="0"/>
+              <a:t>TMDB API </a:t>
+            </a:r>
+          </a:p>
+          <a:p>
+            <a:r>
+              <a:rPr lang="en-US" dirty="0"/>
+              <a:t>U </a:t>
+            </a:r>
+            <a:r>
+              <a:rPr lang="en-US"/>
+              <a:t>Desgin</a:t>
+            </a:r>
+            <a:r>
+              <a:rPr lang="en-US" dirty="0"/>
+              <a:t> (Tailwind &amp; Flowbite)</a:t>
+            </a:r>
+          </a:p>
+          <a:p>
+            <a:endParaRPr lang="en-US" dirty="0"/>
+          </a:p>
+        </p:txBody>
+      </p:sp>
+    </p:spTree>
+    <p:extLst>
+      <p:ext uri="{BB962C8B-B14F-4D97-AF65-F5344CB8AC3E}">
+        <p14:creationId xmlns:p14="http://schemas.microsoft.com/office/powerpoint/2010/main" val="4084655108"/>
       </p:ext>
     </p:extLst>
   </p:cSld>

--- a/ReactJS/Reactjs.pptx
+++ b/ReactJS/Reactjs.pptx
@@ -273,7 +273,7 @@
           <a:p>
             <a:fld id="{E604A9DE-5D16-5148-A31A-5AFF5E45A3E1}" type="datetimeFigureOut">
               <a:rPr lang="en-US" smtClean="0"/>
-              <a:t>4/30/26</a:t>
+              <a:t>5/8/26</a:t>
             </a:fld>
             <a:endParaRPr lang="en-US"/>
           </a:p>
@@ -473,7 +473,7 @@
           <a:p>
             <a:fld id="{E604A9DE-5D16-5148-A31A-5AFF5E45A3E1}" type="datetimeFigureOut">
               <a:rPr lang="en-US" smtClean="0"/>
-              <a:t>4/30/26</a:t>
+              <a:t>5/8/26</a:t>
             </a:fld>
             <a:endParaRPr lang="en-US"/>
           </a:p>
@@ -683,7 +683,7 @@
           <a:p>
             <a:fld id="{E604A9DE-5D16-5148-A31A-5AFF5E45A3E1}" type="datetimeFigureOut">
               <a:rPr lang="en-US" smtClean="0"/>
-              <a:t>4/30/26</a:t>
+              <a:t>5/8/26</a:t>
             </a:fld>
             <a:endParaRPr lang="en-US"/>
           </a:p>
@@ -883,7 +883,7 @@
           <a:p>
             <a:fld id="{E604A9DE-5D16-5148-A31A-5AFF5E45A3E1}" type="datetimeFigureOut">
               <a:rPr lang="en-US" smtClean="0"/>
-              <a:t>4/30/26</a:t>
+              <a:t>5/8/26</a:t>
             </a:fld>
             <a:endParaRPr lang="en-US"/>
           </a:p>
@@ -1159,7 +1159,7 @@
           <a:p>
             <a:fld id="{E604A9DE-5D16-5148-A31A-5AFF5E45A3E1}" type="datetimeFigureOut">
               <a:rPr lang="en-US" smtClean="0"/>
-              <a:t>4/30/26</a:t>
+              <a:t>5/8/26</a:t>
             </a:fld>
             <a:endParaRPr lang="en-US"/>
           </a:p>
@@ -1427,7 +1427,7 @@
           <a:p>
             <a:fld id="{E604A9DE-5D16-5148-A31A-5AFF5E45A3E1}" type="datetimeFigureOut">
               <a:rPr lang="en-US" smtClean="0"/>
-              <a:t>4/30/26</a:t>
+              <a:t>5/8/26</a:t>
             </a:fld>
             <a:endParaRPr lang="en-US"/>
           </a:p>
@@ -1842,7 +1842,7 @@
           <a:p>
             <a:fld id="{E604A9DE-5D16-5148-A31A-5AFF5E45A3E1}" type="datetimeFigureOut">
               <a:rPr lang="en-US" smtClean="0"/>
-              <a:t>4/30/26</a:t>
+              <a:t>5/8/26</a:t>
             </a:fld>
             <a:endParaRPr lang="en-US"/>
           </a:p>
@@ -1984,7 +1984,7 @@
           <a:p>
             <a:fld id="{E604A9DE-5D16-5148-A31A-5AFF5E45A3E1}" type="datetimeFigureOut">
               <a:rPr lang="en-US" smtClean="0"/>
-              <a:t>4/30/26</a:t>
+              <a:t>5/8/26</a:t>
             </a:fld>
             <a:endParaRPr lang="en-US"/>
           </a:p>
@@ -2097,7 +2097,7 @@
           <a:p>
             <a:fld id="{E604A9DE-5D16-5148-A31A-5AFF5E45A3E1}" type="datetimeFigureOut">
               <a:rPr lang="en-US" smtClean="0"/>
-              <a:t>4/30/26</a:t>
+              <a:t>5/8/26</a:t>
             </a:fld>
             <a:endParaRPr lang="en-US"/>
           </a:p>
@@ -2410,7 +2410,7 @@
           <a:p>
             <a:fld id="{E604A9DE-5D16-5148-A31A-5AFF5E45A3E1}" type="datetimeFigureOut">
               <a:rPr lang="en-US" smtClean="0"/>
-              <a:t>4/30/26</a:t>
+              <a:t>5/8/26</a:t>
             </a:fld>
             <a:endParaRPr lang="en-US"/>
           </a:p>
@@ -2699,7 +2699,7 @@
           <a:p>
             <a:fld id="{E604A9DE-5D16-5148-A31A-5AFF5E45A3E1}" type="datetimeFigureOut">
               <a:rPr lang="en-US" smtClean="0"/>
-              <a:t>4/30/26</a:t>
+              <a:t>5/8/26</a:t>
             </a:fld>
             <a:endParaRPr lang="en-US"/>
           </a:p>
@@ -2942,7 +2942,7 @@
           <a:p>
             <a:fld id="{E604A9DE-5D16-5148-A31A-5AFF5E45A3E1}" type="datetimeFigureOut">
               <a:rPr lang="en-US" smtClean="0"/>
-              <a:t>4/30/26</a:t>
+              <a:t>5/8/26</a:t>
             </a:fld>
             <a:endParaRPr lang="en-US"/>
           </a:p>
@@ -3995,9 +3995,16 @@
             <p:ph idx="1"/>
           </p:nvPr>
         </p:nvSpPr>
-        <p:spPr/>
-        <p:txBody>
-          <a:bodyPr/>
+        <p:spPr>
+          <a:xfrm>
+            <a:off x="571500" y="1392382"/>
+            <a:ext cx="10782300" cy="5247409"/>
+          </a:xfrm>
+        </p:spPr>
+        <p:txBody>
+          <a:bodyPr numCol="2">
+            <a:normAutofit/>
+          </a:bodyPr>
           <a:lstStyle/>
           <a:p>
             <a:r>
@@ -4026,16 +4033,72 @@
           <a:p>
             <a:r>
               <a:rPr lang="en-US" dirty="0"/>
-              <a:t>U </a:t>
+              <a:t>UI Design (Tailwind &amp; Flowbite)</a:t>
+            </a:r>
+          </a:p>
+          <a:p>
+            <a:r>
+              <a:rPr lang="en-US" dirty="0"/>
+              <a:t>Navigation Structure</a:t>
+            </a:r>
+          </a:p>
+          <a:p>
+            <a:r>
+              <a:rPr lang="en-US" dirty="0"/>
+              <a:t>Dark Mode integration</a:t>
+            </a:r>
+          </a:p>
+          <a:p>
+            <a:r>
+              <a:rPr lang="en-US" dirty="0"/>
+              <a:t>Movie List Structure</a:t>
+            </a:r>
+          </a:p>
+          <a:p>
+            <a:r>
+              <a:rPr lang="en-US" dirty="0"/>
+              <a:t>API Fetch Movie List</a:t>
+            </a:r>
+          </a:p>
+          <a:p>
+            <a:r>
+              <a:rPr lang="en-US" dirty="0"/>
+              <a:t>Custom Hook </a:t>
+            </a:r>
+            <a:r>
+              <a:rPr lang="en-US" dirty="0" err="1"/>
+              <a:t>useFetch</a:t>
+            </a:r>
+            <a:endParaRPr lang="en-US" dirty="0"/>
+          </a:p>
+          <a:p>
+            <a:r>
+              <a:rPr lang="en-US" dirty="0"/>
+              <a:t>API Fetch Movie Search</a:t>
+            </a:r>
+          </a:p>
+          <a:p>
+            <a:r>
+              <a:rPr lang="en-US" dirty="0"/>
+              <a:t>Tailwind CSS customization</a:t>
+            </a:r>
+          </a:p>
+          <a:p>
+            <a:r>
+              <a:rPr lang="en-US" dirty="0"/>
+              <a:t>Page Not Found</a:t>
+            </a:r>
+          </a:p>
+          <a:p>
+            <a:r>
+              <a:rPr lang="en-US" dirty="0"/>
+              <a:t>Individual </a:t>
             </a:r>
             <a:r>
               <a:rPr lang="en-US"/>
-              <a:t>Desgin</a:t>
-            </a:r>
-            <a:r>
-              <a:rPr lang="en-US" dirty="0"/>
-              <a:t> (Tailwind &amp; Flowbite)</a:t>
-            </a:r>
+              <a:t>Movie information</a:t>
+            </a:r>
+            <a:endParaRPr lang="en-US" dirty="0"/>
           </a:p>
           <a:p>
             <a:endParaRPr lang="en-US" dirty="0"/>
